--- a/docs/08_簡報/AI_流程圖大全_給指導老師_2026-10-10.pptx
+++ b/docs/08_簡報/AI_流程圖大全_給指導老師_2026-10-10.pptx
@@ -35,6 +35,20 @@
     <p:sldId id="283" r:id="rId34"/>
     <p:sldId id="284" r:id="rId35"/>
     <p:sldId id="285" r:id="rId36"/>
+    <p:sldId id="286" r:id="rId37"/>
+    <p:sldId id="287" r:id="rId38"/>
+    <p:sldId id="288" r:id="rId39"/>
+    <p:sldId id="289" r:id="rId40"/>
+    <p:sldId id="290" r:id="rId41"/>
+    <p:sldId id="291" r:id="rId42"/>
+    <p:sldId id="292" r:id="rId43"/>
+    <p:sldId id="293" r:id="rId44"/>
+    <p:sldId id="294" r:id="rId45"/>
+    <p:sldId id="295" r:id="rId46"/>
+    <p:sldId id="296" r:id="rId47"/>
+    <p:sldId id="297" r:id="rId48"/>
+    <p:sldId id="298" r:id="rId49"/>
+    <p:sldId id="299" r:id="rId50"/>
   </p:sldIdLst>
   <p:sldSz cx="12191695" cy="6858000" type="screen4x3"/>
   <p:notesSz cx="6858000" cy="9144000"/>
@@ -3190,7 +3204,7 @@
                 </a:solidFill>
                 <a:latin typeface="Microsoft JhengHei"/>
               </a:rPr>
-              <a:t>圖 1～27；沿用原流程圖彙整簡報格式，新增圖 20～27 並為每頁標明流程名稱。</a:t>
+              <a:t>圖 1～41；沿用原流程圖彙整簡報格式，新增角色架構、權限、細部流程與介面展示圖。</a:t>
             </a:r>
           </a:p>
         </p:txBody>
@@ -8930,6 +8944,2517 @@
 </p:sld>
 </file>
 
+<file path=ppt/slides/slide31.xml><?xml version="1.0" encoding="utf-8"?>
+<p:sld xmlns:a="http://schemas.openxmlformats.org/drawingml/2006/main" xmlns:p="http://schemas.openxmlformats.org/presentationml/2006/main" xmlns:r="http://schemas.openxmlformats.org/officeDocument/2006/relationships">
+  <p:cSld>
+    <p:bg>
+      <p:bgPr>
+        <a:solidFill>
+          <a:srgbClr val="FFFFFF"/>
+        </a:solidFill>
+        <a:effectLst/>
+      </p:bgPr>
+    </p:bg>
+    <p:spTree>
+      <p:nvGrpSpPr>
+        <p:cNvPr id="1" name=""/>
+        <p:cNvGrpSpPr/>
+        <p:nvPr/>
+      </p:nvGrpSpPr>
+      <p:grpSpPr/>
+      <p:sp>
+        <p:nvSpPr>
+          <p:cNvPr id="2" name="Rectangle 1"/>
+          <p:cNvSpPr/>
+          <p:nvPr/>
+        </p:nvSpPr>
+        <p:spPr>
+          <a:xfrm>
+            <a:off x="0" y="0"/>
+            <a:ext cx="12191695" cy="164592"/>
+          </a:xfrm>
+          <a:prstGeom prst="rect">
+            <a:avLst/>
+          </a:prstGeom>
+          <a:solidFill>
+            <a:srgbClr val="208985"/>
+          </a:solidFill>
+          <a:ln>
+            <a:noFill/>
+          </a:ln>
+        </p:spPr>
+        <p:style>
+          <a:lnRef idx="1">
+            <a:schemeClr val="accent1"/>
+          </a:lnRef>
+          <a:fillRef idx="3">
+            <a:schemeClr val="accent1"/>
+          </a:fillRef>
+          <a:effectRef idx="2">
+            <a:schemeClr val="accent1"/>
+          </a:effectRef>
+          <a:fontRef idx="minor">
+            <a:schemeClr val="lt1"/>
+          </a:fontRef>
+        </p:style>
+        <p:txBody>
+          <a:bodyPr rtlCol="0" anchor="ctr"/>
+          <a:lstStyle/>
+          <a:p>
+            <a:pPr algn="ctr"/>
+          </a:p>
+        </p:txBody>
+      </p:sp>
+      <p:sp>
+        <p:nvSpPr>
+          <p:cNvPr id="3" name="TextBox 2"/>
+          <p:cNvSpPr txBox="1"/>
+          <p:nvPr/>
+        </p:nvSpPr>
+        <p:spPr>
+          <a:xfrm>
+            <a:off x="566928" y="438912"/>
+            <a:ext cx="10881360" cy="502920"/>
+          </a:xfrm>
+          <a:prstGeom prst="rect">
+            <a:avLst/>
+          </a:prstGeom>
+          <a:noFill/>
+        </p:spPr>
+        <p:txBody>
+          <a:bodyPr wrap="square" lIns="54864" rIns="54864" tIns="27432" bIns="27432" anchor="t">
+            <a:spAutoFit/>
+          </a:bodyPr>
+          <a:lstStyle/>
+          <a:p>
+            <a:pPr algn="l"/>
+            <a:r>
+              <a:rPr sz="2700" b="1">
+                <a:solidFill>
+                  <a:srgbClr val="142E4E"/>
+                </a:solidFill>
+                <a:latin typeface="Microsoft JhengHei"/>
+              </a:rPr>
+              <a:t>圖 28｜學生角色功能架構圖</a:t>
+            </a:r>
+          </a:p>
+        </p:txBody>
+      </p:sp>
+      <p:sp>
+        <p:nvSpPr>
+          <p:cNvPr id="4" name="TextBox 3"/>
+          <p:cNvSpPr txBox="1"/>
+          <p:nvPr/>
+        </p:nvSpPr>
+        <p:spPr>
+          <a:xfrm>
+            <a:off x="10378440" y="512064"/>
+            <a:ext cx="1234440" cy="228600"/>
+          </a:xfrm>
+          <a:prstGeom prst="rect">
+            <a:avLst/>
+          </a:prstGeom>
+          <a:noFill/>
+        </p:spPr>
+        <p:txBody>
+          <a:bodyPr wrap="square" lIns="54864" rIns="54864" tIns="27432" bIns="27432" anchor="t">
+            <a:spAutoFit/>
+          </a:bodyPr>
+          <a:lstStyle/>
+          <a:p>
+            <a:pPr algn="r"/>
+            <a:r>
+              <a:rPr sz="900" b="1">
+                <a:solidFill>
+                  <a:srgbClr val="208985"/>
+                </a:solidFill>
+                <a:latin typeface="Microsoft JhengHei"/>
+              </a:rPr>
+              <a:t>流程圖附錄</a:t>
+            </a:r>
+          </a:p>
+        </p:txBody>
+      </p:sp>
+      <p:sp>
+        <p:nvSpPr>
+          <p:cNvPr id="5" name="TextBox 4"/>
+          <p:cNvSpPr txBox="1"/>
+          <p:nvPr/>
+        </p:nvSpPr>
+        <p:spPr>
+          <a:xfrm>
+            <a:off x="566928" y="6565392"/>
+            <a:ext cx="7772400" cy="182880"/>
+          </a:xfrm>
+          <a:prstGeom prst="rect">
+            <a:avLst/>
+          </a:prstGeom>
+          <a:noFill/>
+        </p:spPr>
+        <p:txBody>
+          <a:bodyPr wrap="square" lIns="54864" rIns="54864" tIns="27432" bIns="27432" anchor="t">
+            <a:spAutoFit/>
+          </a:bodyPr>
+          <a:lstStyle/>
+          <a:p>
+            <a:pPr algn="l"/>
+            <a:r>
+              <a:rPr sz="800" b="0">
+                <a:solidFill>
+                  <a:srgbClr val="5D6B79"/>
+                </a:solidFill>
+                <a:latin typeface="Microsoft JhengHei"/>
+              </a:rPr>
+              <a:t>資管科智慧學習歷程系統｜指導老師討論版</a:t>
+            </a:r>
+          </a:p>
+        </p:txBody>
+      </p:sp>
+      <p:sp>
+        <p:nvSpPr>
+          <p:cNvPr id="6" name="TextBox 5"/>
+          <p:cNvSpPr txBox="1"/>
+          <p:nvPr/>
+        </p:nvSpPr>
+        <p:spPr>
+          <a:xfrm>
+            <a:off x="731520" y="1554480"/>
+            <a:ext cx="10698480" cy="457200"/>
+          </a:xfrm>
+          <a:prstGeom prst="rect">
+            <a:avLst/>
+          </a:prstGeom>
+          <a:noFill/>
+        </p:spPr>
+        <p:txBody>
+          <a:bodyPr wrap="square" lIns="54864" rIns="54864" tIns="27432" bIns="27432" anchor="t">
+            <a:spAutoFit/>
+          </a:bodyPr>
+          <a:lstStyle/>
+          <a:p>
+            <a:pPr algn="ctr"/>
+            <a:r>
+              <a:rPr sz="2800" b="1">
+                <a:solidFill>
+                  <a:srgbClr val="142E4E"/>
+                </a:solidFill>
+                <a:latin typeface="Microsoft JhengHei"/>
+              </a:rPr>
+              <a:t>此頁保留圖名與貼圖位置</a:t>
+            </a:r>
+          </a:p>
+        </p:txBody>
+      </p:sp>
+      <p:sp>
+        <p:nvSpPr>
+          <p:cNvPr id="7" name="TextBox 6"/>
+          <p:cNvSpPr txBox="1"/>
+          <p:nvPr/>
+        </p:nvSpPr>
+        <p:spPr>
+          <a:xfrm>
+            <a:off x="731520" y="2331720"/>
+            <a:ext cx="10698480" cy="320040"/>
+          </a:xfrm>
+          <a:prstGeom prst="rect">
+            <a:avLst/>
+          </a:prstGeom>
+          <a:noFill/>
+        </p:spPr>
+        <p:txBody>
+          <a:bodyPr wrap="square" lIns="54864" rIns="54864" tIns="27432" bIns="27432" anchor="t">
+            <a:spAutoFit/>
+          </a:bodyPr>
+          <a:lstStyle/>
+          <a:p>
+            <a:pPr algn="ctr"/>
+            <a:r>
+              <a:rPr sz="1700" b="0">
+                <a:solidFill>
+                  <a:srgbClr val="5D6B79"/>
+                </a:solidFill>
+                <a:latin typeface="Microsoft JhengHei"/>
+              </a:rPr>
+              <a:t>圖稿原始碼：docs/images/D-31-student-role-architecture.mmd</a:t>
+            </a:r>
+          </a:p>
+        </p:txBody>
+      </p:sp>
+      <p:sp>
+        <p:nvSpPr>
+          <p:cNvPr id="8" name="TextBox 7"/>
+          <p:cNvSpPr txBox="1"/>
+          <p:nvPr/>
+        </p:nvSpPr>
+        <p:spPr>
+          <a:xfrm>
+            <a:off x="731520" y="2971800"/>
+            <a:ext cx="10698480" cy="411480"/>
+          </a:xfrm>
+          <a:prstGeom prst="rect">
+            <a:avLst/>
+          </a:prstGeom>
+          <a:noFill/>
+        </p:spPr>
+        <p:txBody>
+          <a:bodyPr wrap="square" lIns="54864" rIns="54864" tIns="27432" bIns="27432" anchor="t">
+            <a:spAutoFit/>
+          </a:bodyPr>
+          <a:lstStyle/>
+          <a:p>
+            <a:pPr algn="ctr"/>
+            <a:r>
+              <a:rPr sz="1700" b="0">
+                <a:solidFill>
+                  <a:srgbClr val="5D6B79"/>
+                </a:solidFill>
+                <a:latin typeface="Microsoft JhengHei"/>
+              </a:rPr>
+              <a:t>目前環境尚未輸出 PNG；可將對應圖檔貼到此頁後，再上傳雲端或 Canva。</a:t>
+            </a:r>
+          </a:p>
+        </p:txBody>
+      </p:sp>
+    </p:spTree>
+  </p:cSld>
+  <p:clrMapOvr>
+    <a:masterClrMapping/>
+  </p:clrMapOvr>
+</p:sld>
+</file>
+
+<file path=ppt/slides/slide32.xml><?xml version="1.0" encoding="utf-8"?>
+<p:sld xmlns:a="http://schemas.openxmlformats.org/drawingml/2006/main" xmlns:p="http://schemas.openxmlformats.org/presentationml/2006/main" xmlns:r="http://schemas.openxmlformats.org/officeDocument/2006/relationships">
+  <p:cSld>
+    <p:bg>
+      <p:bgPr>
+        <a:solidFill>
+          <a:srgbClr val="FFFFFF"/>
+        </a:solidFill>
+        <a:effectLst/>
+      </p:bgPr>
+    </p:bg>
+    <p:spTree>
+      <p:nvGrpSpPr>
+        <p:cNvPr id="1" name=""/>
+        <p:cNvGrpSpPr/>
+        <p:nvPr/>
+      </p:nvGrpSpPr>
+      <p:grpSpPr/>
+      <p:sp>
+        <p:nvSpPr>
+          <p:cNvPr id="2" name="Rectangle 1"/>
+          <p:cNvSpPr/>
+          <p:nvPr/>
+        </p:nvSpPr>
+        <p:spPr>
+          <a:xfrm>
+            <a:off x="0" y="0"/>
+            <a:ext cx="12191695" cy="164592"/>
+          </a:xfrm>
+          <a:prstGeom prst="rect">
+            <a:avLst/>
+          </a:prstGeom>
+          <a:solidFill>
+            <a:srgbClr val="208985"/>
+          </a:solidFill>
+          <a:ln>
+            <a:noFill/>
+          </a:ln>
+        </p:spPr>
+        <p:style>
+          <a:lnRef idx="1">
+            <a:schemeClr val="accent1"/>
+          </a:lnRef>
+          <a:fillRef idx="3">
+            <a:schemeClr val="accent1"/>
+          </a:fillRef>
+          <a:effectRef idx="2">
+            <a:schemeClr val="accent1"/>
+          </a:effectRef>
+          <a:fontRef idx="minor">
+            <a:schemeClr val="lt1"/>
+          </a:fontRef>
+        </p:style>
+        <p:txBody>
+          <a:bodyPr rtlCol="0" anchor="ctr"/>
+          <a:lstStyle/>
+          <a:p>
+            <a:pPr algn="ctr"/>
+          </a:p>
+        </p:txBody>
+      </p:sp>
+      <p:sp>
+        <p:nvSpPr>
+          <p:cNvPr id="3" name="TextBox 2"/>
+          <p:cNvSpPr txBox="1"/>
+          <p:nvPr/>
+        </p:nvSpPr>
+        <p:spPr>
+          <a:xfrm>
+            <a:off x="566928" y="438912"/>
+            <a:ext cx="10881360" cy="502920"/>
+          </a:xfrm>
+          <a:prstGeom prst="rect">
+            <a:avLst/>
+          </a:prstGeom>
+          <a:noFill/>
+        </p:spPr>
+        <p:txBody>
+          <a:bodyPr wrap="square" lIns="54864" rIns="54864" tIns="27432" bIns="27432" anchor="t">
+            <a:spAutoFit/>
+          </a:bodyPr>
+          <a:lstStyle/>
+          <a:p>
+            <a:pPr algn="l"/>
+            <a:r>
+              <a:rPr sz="2700" b="1">
+                <a:solidFill>
+                  <a:srgbClr val="142E4E"/>
+                </a:solidFill>
+                <a:latin typeface="Microsoft JhengHei"/>
+              </a:rPr>
+              <a:t>圖 29｜教師／導師角色功能架構圖</a:t>
+            </a:r>
+          </a:p>
+        </p:txBody>
+      </p:sp>
+      <p:sp>
+        <p:nvSpPr>
+          <p:cNvPr id="4" name="TextBox 3"/>
+          <p:cNvSpPr txBox="1"/>
+          <p:nvPr/>
+        </p:nvSpPr>
+        <p:spPr>
+          <a:xfrm>
+            <a:off x="10378440" y="512064"/>
+            <a:ext cx="1234440" cy="228600"/>
+          </a:xfrm>
+          <a:prstGeom prst="rect">
+            <a:avLst/>
+          </a:prstGeom>
+          <a:noFill/>
+        </p:spPr>
+        <p:txBody>
+          <a:bodyPr wrap="square" lIns="54864" rIns="54864" tIns="27432" bIns="27432" anchor="t">
+            <a:spAutoFit/>
+          </a:bodyPr>
+          <a:lstStyle/>
+          <a:p>
+            <a:pPr algn="r"/>
+            <a:r>
+              <a:rPr sz="900" b="1">
+                <a:solidFill>
+                  <a:srgbClr val="208985"/>
+                </a:solidFill>
+                <a:latin typeface="Microsoft JhengHei"/>
+              </a:rPr>
+              <a:t>流程圖附錄</a:t>
+            </a:r>
+          </a:p>
+        </p:txBody>
+      </p:sp>
+      <p:sp>
+        <p:nvSpPr>
+          <p:cNvPr id="5" name="TextBox 4"/>
+          <p:cNvSpPr txBox="1"/>
+          <p:nvPr/>
+        </p:nvSpPr>
+        <p:spPr>
+          <a:xfrm>
+            <a:off x="566928" y="6565392"/>
+            <a:ext cx="7772400" cy="182880"/>
+          </a:xfrm>
+          <a:prstGeom prst="rect">
+            <a:avLst/>
+          </a:prstGeom>
+          <a:noFill/>
+        </p:spPr>
+        <p:txBody>
+          <a:bodyPr wrap="square" lIns="54864" rIns="54864" tIns="27432" bIns="27432" anchor="t">
+            <a:spAutoFit/>
+          </a:bodyPr>
+          <a:lstStyle/>
+          <a:p>
+            <a:pPr algn="l"/>
+            <a:r>
+              <a:rPr sz="800" b="0">
+                <a:solidFill>
+                  <a:srgbClr val="5D6B79"/>
+                </a:solidFill>
+                <a:latin typeface="Microsoft JhengHei"/>
+              </a:rPr>
+              <a:t>資管科智慧學習歷程系統｜指導老師討論版</a:t>
+            </a:r>
+          </a:p>
+        </p:txBody>
+      </p:sp>
+      <p:sp>
+        <p:nvSpPr>
+          <p:cNvPr id="6" name="TextBox 5"/>
+          <p:cNvSpPr txBox="1"/>
+          <p:nvPr/>
+        </p:nvSpPr>
+        <p:spPr>
+          <a:xfrm>
+            <a:off x="731520" y="1554480"/>
+            <a:ext cx="10698480" cy="457200"/>
+          </a:xfrm>
+          <a:prstGeom prst="rect">
+            <a:avLst/>
+          </a:prstGeom>
+          <a:noFill/>
+        </p:spPr>
+        <p:txBody>
+          <a:bodyPr wrap="square" lIns="54864" rIns="54864" tIns="27432" bIns="27432" anchor="t">
+            <a:spAutoFit/>
+          </a:bodyPr>
+          <a:lstStyle/>
+          <a:p>
+            <a:pPr algn="ctr"/>
+            <a:r>
+              <a:rPr sz="2800" b="1">
+                <a:solidFill>
+                  <a:srgbClr val="142E4E"/>
+                </a:solidFill>
+                <a:latin typeface="Microsoft JhengHei"/>
+              </a:rPr>
+              <a:t>此頁保留圖名與貼圖位置</a:t>
+            </a:r>
+          </a:p>
+        </p:txBody>
+      </p:sp>
+      <p:sp>
+        <p:nvSpPr>
+          <p:cNvPr id="7" name="TextBox 6"/>
+          <p:cNvSpPr txBox="1"/>
+          <p:nvPr/>
+        </p:nvSpPr>
+        <p:spPr>
+          <a:xfrm>
+            <a:off x="731520" y="2331720"/>
+            <a:ext cx="10698480" cy="320040"/>
+          </a:xfrm>
+          <a:prstGeom prst="rect">
+            <a:avLst/>
+          </a:prstGeom>
+          <a:noFill/>
+        </p:spPr>
+        <p:txBody>
+          <a:bodyPr wrap="square" lIns="54864" rIns="54864" tIns="27432" bIns="27432" anchor="t">
+            <a:spAutoFit/>
+          </a:bodyPr>
+          <a:lstStyle/>
+          <a:p>
+            <a:pPr algn="ctr"/>
+            <a:r>
+              <a:rPr sz="1700" b="0">
+                <a:solidFill>
+                  <a:srgbClr val="5D6B79"/>
+                </a:solidFill>
+                <a:latin typeface="Microsoft JhengHei"/>
+              </a:rPr>
+              <a:t>圖稿原始碼：docs/images/D-32-teacher-role-architecture.mmd</a:t>
+            </a:r>
+          </a:p>
+        </p:txBody>
+      </p:sp>
+      <p:sp>
+        <p:nvSpPr>
+          <p:cNvPr id="8" name="TextBox 7"/>
+          <p:cNvSpPr txBox="1"/>
+          <p:nvPr/>
+        </p:nvSpPr>
+        <p:spPr>
+          <a:xfrm>
+            <a:off x="731520" y="2971800"/>
+            <a:ext cx="10698480" cy="411480"/>
+          </a:xfrm>
+          <a:prstGeom prst="rect">
+            <a:avLst/>
+          </a:prstGeom>
+          <a:noFill/>
+        </p:spPr>
+        <p:txBody>
+          <a:bodyPr wrap="square" lIns="54864" rIns="54864" tIns="27432" bIns="27432" anchor="t">
+            <a:spAutoFit/>
+          </a:bodyPr>
+          <a:lstStyle/>
+          <a:p>
+            <a:pPr algn="ctr"/>
+            <a:r>
+              <a:rPr sz="1700" b="0">
+                <a:solidFill>
+                  <a:srgbClr val="5D6B79"/>
+                </a:solidFill>
+                <a:latin typeface="Microsoft JhengHei"/>
+              </a:rPr>
+              <a:t>目前環境尚未輸出 PNG；可將對應圖檔貼到此頁後，再上傳雲端或 Canva。</a:t>
+            </a:r>
+          </a:p>
+        </p:txBody>
+      </p:sp>
+    </p:spTree>
+  </p:cSld>
+  <p:clrMapOvr>
+    <a:masterClrMapping/>
+  </p:clrMapOvr>
+</p:sld>
+</file>
+
+<file path=ppt/slides/slide33.xml><?xml version="1.0" encoding="utf-8"?>
+<p:sld xmlns:a="http://schemas.openxmlformats.org/drawingml/2006/main" xmlns:p="http://schemas.openxmlformats.org/presentationml/2006/main" xmlns:r="http://schemas.openxmlformats.org/officeDocument/2006/relationships">
+  <p:cSld>
+    <p:bg>
+      <p:bgPr>
+        <a:solidFill>
+          <a:srgbClr val="FFFFFF"/>
+        </a:solidFill>
+        <a:effectLst/>
+      </p:bgPr>
+    </p:bg>
+    <p:spTree>
+      <p:nvGrpSpPr>
+        <p:cNvPr id="1" name=""/>
+        <p:cNvGrpSpPr/>
+        <p:nvPr/>
+      </p:nvGrpSpPr>
+      <p:grpSpPr/>
+      <p:sp>
+        <p:nvSpPr>
+          <p:cNvPr id="2" name="Rectangle 1"/>
+          <p:cNvSpPr/>
+          <p:nvPr/>
+        </p:nvSpPr>
+        <p:spPr>
+          <a:xfrm>
+            <a:off x="0" y="0"/>
+            <a:ext cx="12191695" cy="164592"/>
+          </a:xfrm>
+          <a:prstGeom prst="rect">
+            <a:avLst/>
+          </a:prstGeom>
+          <a:solidFill>
+            <a:srgbClr val="208985"/>
+          </a:solidFill>
+          <a:ln>
+            <a:noFill/>
+          </a:ln>
+        </p:spPr>
+        <p:style>
+          <a:lnRef idx="1">
+            <a:schemeClr val="accent1"/>
+          </a:lnRef>
+          <a:fillRef idx="3">
+            <a:schemeClr val="accent1"/>
+          </a:fillRef>
+          <a:effectRef idx="2">
+            <a:schemeClr val="accent1"/>
+          </a:effectRef>
+          <a:fontRef idx="minor">
+            <a:schemeClr val="lt1"/>
+          </a:fontRef>
+        </p:style>
+        <p:txBody>
+          <a:bodyPr rtlCol="0" anchor="ctr"/>
+          <a:lstStyle/>
+          <a:p>
+            <a:pPr algn="ctr"/>
+          </a:p>
+        </p:txBody>
+      </p:sp>
+      <p:sp>
+        <p:nvSpPr>
+          <p:cNvPr id="3" name="TextBox 2"/>
+          <p:cNvSpPr txBox="1"/>
+          <p:nvPr/>
+        </p:nvSpPr>
+        <p:spPr>
+          <a:xfrm>
+            <a:off x="566928" y="438912"/>
+            <a:ext cx="10881360" cy="502920"/>
+          </a:xfrm>
+          <a:prstGeom prst="rect">
+            <a:avLst/>
+          </a:prstGeom>
+          <a:noFill/>
+        </p:spPr>
+        <p:txBody>
+          <a:bodyPr wrap="square" lIns="54864" rIns="54864" tIns="27432" bIns="27432" anchor="t">
+            <a:spAutoFit/>
+          </a:bodyPr>
+          <a:lstStyle/>
+          <a:p>
+            <a:pPr algn="l"/>
+            <a:r>
+              <a:rPr sz="2700" b="1">
+                <a:solidFill>
+                  <a:srgbClr val="142E4E"/>
+                </a:solidFill>
+                <a:latin typeface="Microsoft JhengHei"/>
+              </a:rPr>
+              <a:t>圖 30｜科辦／行政角色功能架構圖</a:t>
+            </a:r>
+          </a:p>
+        </p:txBody>
+      </p:sp>
+      <p:sp>
+        <p:nvSpPr>
+          <p:cNvPr id="4" name="TextBox 3"/>
+          <p:cNvSpPr txBox="1"/>
+          <p:nvPr/>
+        </p:nvSpPr>
+        <p:spPr>
+          <a:xfrm>
+            <a:off x="10378440" y="512064"/>
+            <a:ext cx="1234440" cy="228600"/>
+          </a:xfrm>
+          <a:prstGeom prst="rect">
+            <a:avLst/>
+          </a:prstGeom>
+          <a:noFill/>
+        </p:spPr>
+        <p:txBody>
+          <a:bodyPr wrap="square" lIns="54864" rIns="54864" tIns="27432" bIns="27432" anchor="t">
+            <a:spAutoFit/>
+          </a:bodyPr>
+          <a:lstStyle/>
+          <a:p>
+            <a:pPr algn="r"/>
+            <a:r>
+              <a:rPr sz="900" b="1">
+                <a:solidFill>
+                  <a:srgbClr val="208985"/>
+                </a:solidFill>
+                <a:latin typeface="Microsoft JhengHei"/>
+              </a:rPr>
+              <a:t>流程圖附錄</a:t>
+            </a:r>
+          </a:p>
+        </p:txBody>
+      </p:sp>
+      <p:sp>
+        <p:nvSpPr>
+          <p:cNvPr id="5" name="TextBox 4"/>
+          <p:cNvSpPr txBox="1"/>
+          <p:nvPr/>
+        </p:nvSpPr>
+        <p:spPr>
+          <a:xfrm>
+            <a:off x="566928" y="6565392"/>
+            <a:ext cx="7772400" cy="182880"/>
+          </a:xfrm>
+          <a:prstGeom prst="rect">
+            <a:avLst/>
+          </a:prstGeom>
+          <a:noFill/>
+        </p:spPr>
+        <p:txBody>
+          <a:bodyPr wrap="square" lIns="54864" rIns="54864" tIns="27432" bIns="27432" anchor="t">
+            <a:spAutoFit/>
+          </a:bodyPr>
+          <a:lstStyle/>
+          <a:p>
+            <a:pPr algn="l"/>
+            <a:r>
+              <a:rPr sz="800" b="0">
+                <a:solidFill>
+                  <a:srgbClr val="5D6B79"/>
+                </a:solidFill>
+                <a:latin typeface="Microsoft JhengHei"/>
+              </a:rPr>
+              <a:t>資管科智慧學習歷程系統｜指導老師討論版</a:t>
+            </a:r>
+          </a:p>
+        </p:txBody>
+      </p:sp>
+      <p:sp>
+        <p:nvSpPr>
+          <p:cNvPr id="6" name="TextBox 5"/>
+          <p:cNvSpPr txBox="1"/>
+          <p:nvPr/>
+        </p:nvSpPr>
+        <p:spPr>
+          <a:xfrm>
+            <a:off x="731520" y="1554480"/>
+            <a:ext cx="10698480" cy="457200"/>
+          </a:xfrm>
+          <a:prstGeom prst="rect">
+            <a:avLst/>
+          </a:prstGeom>
+          <a:noFill/>
+        </p:spPr>
+        <p:txBody>
+          <a:bodyPr wrap="square" lIns="54864" rIns="54864" tIns="27432" bIns="27432" anchor="t">
+            <a:spAutoFit/>
+          </a:bodyPr>
+          <a:lstStyle/>
+          <a:p>
+            <a:pPr algn="ctr"/>
+            <a:r>
+              <a:rPr sz="2800" b="1">
+                <a:solidFill>
+                  <a:srgbClr val="142E4E"/>
+                </a:solidFill>
+                <a:latin typeface="Microsoft JhengHei"/>
+              </a:rPr>
+              <a:t>此頁保留圖名與貼圖位置</a:t>
+            </a:r>
+          </a:p>
+        </p:txBody>
+      </p:sp>
+      <p:sp>
+        <p:nvSpPr>
+          <p:cNvPr id="7" name="TextBox 6"/>
+          <p:cNvSpPr txBox="1"/>
+          <p:nvPr/>
+        </p:nvSpPr>
+        <p:spPr>
+          <a:xfrm>
+            <a:off x="731520" y="2331720"/>
+            <a:ext cx="10698480" cy="320040"/>
+          </a:xfrm>
+          <a:prstGeom prst="rect">
+            <a:avLst/>
+          </a:prstGeom>
+          <a:noFill/>
+        </p:spPr>
+        <p:txBody>
+          <a:bodyPr wrap="square" lIns="54864" rIns="54864" tIns="27432" bIns="27432" anchor="t">
+            <a:spAutoFit/>
+          </a:bodyPr>
+          <a:lstStyle/>
+          <a:p>
+            <a:pPr algn="ctr"/>
+            <a:r>
+              <a:rPr sz="1700" b="0">
+                <a:solidFill>
+                  <a:srgbClr val="5D6B79"/>
+                </a:solidFill>
+                <a:latin typeface="Microsoft JhengHei"/>
+              </a:rPr>
+              <a:t>圖稿原始碼：docs/images/D-33-staff-role-architecture.mmd</a:t>
+            </a:r>
+          </a:p>
+        </p:txBody>
+      </p:sp>
+      <p:sp>
+        <p:nvSpPr>
+          <p:cNvPr id="8" name="TextBox 7"/>
+          <p:cNvSpPr txBox="1"/>
+          <p:nvPr/>
+        </p:nvSpPr>
+        <p:spPr>
+          <a:xfrm>
+            <a:off x="731520" y="2971800"/>
+            <a:ext cx="10698480" cy="411480"/>
+          </a:xfrm>
+          <a:prstGeom prst="rect">
+            <a:avLst/>
+          </a:prstGeom>
+          <a:noFill/>
+        </p:spPr>
+        <p:txBody>
+          <a:bodyPr wrap="square" lIns="54864" rIns="54864" tIns="27432" bIns="27432" anchor="t">
+            <a:spAutoFit/>
+          </a:bodyPr>
+          <a:lstStyle/>
+          <a:p>
+            <a:pPr algn="ctr"/>
+            <a:r>
+              <a:rPr sz="1700" b="0">
+                <a:solidFill>
+                  <a:srgbClr val="5D6B79"/>
+                </a:solidFill>
+                <a:latin typeface="Microsoft JhengHei"/>
+              </a:rPr>
+              <a:t>目前環境尚未輸出 PNG；可將對應圖檔貼到此頁後，再上傳雲端或 Canva。</a:t>
+            </a:r>
+          </a:p>
+        </p:txBody>
+      </p:sp>
+    </p:spTree>
+  </p:cSld>
+  <p:clrMapOvr>
+    <a:masterClrMapping/>
+  </p:clrMapOvr>
+</p:sld>
+</file>
+
+<file path=ppt/slides/slide34.xml><?xml version="1.0" encoding="utf-8"?>
+<p:sld xmlns:a="http://schemas.openxmlformats.org/drawingml/2006/main" xmlns:p="http://schemas.openxmlformats.org/presentationml/2006/main" xmlns:r="http://schemas.openxmlformats.org/officeDocument/2006/relationships">
+  <p:cSld>
+    <p:bg>
+      <p:bgPr>
+        <a:solidFill>
+          <a:srgbClr val="FFFFFF"/>
+        </a:solidFill>
+        <a:effectLst/>
+      </p:bgPr>
+    </p:bg>
+    <p:spTree>
+      <p:nvGrpSpPr>
+        <p:cNvPr id="1" name=""/>
+        <p:cNvGrpSpPr/>
+        <p:nvPr/>
+      </p:nvGrpSpPr>
+      <p:grpSpPr/>
+      <p:sp>
+        <p:nvSpPr>
+          <p:cNvPr id="2" name="Rectangle 1"/>
+          <p:cNvSpPr/>
+          <p:nvPr/>
+        </p:nvSpPr>
+        <p:spPr>
+          <a:xfrm>
+            <a:off x="0" y="0"/>
+            <a:ext cx="12191695" cy="164592"/>
+          </a:xfrm>
+          <a:prstGeom prst="rect">
+            <a:avLst/>
+          </a:prstGeom>
+          <a:solidFill>
+            <a:srgbClr val="208985"/>
+          </a:solidFill>
+          <a:ln>
+            <a:noFill/>
+          </a:ln>
+        </p:spPr>
+        <p:style>
+          <a:lnRef idx="1">
+            <a:schemeClr val="accent1"/>
+          </a:lnRef>
+          <a:fillRef idx="3">
+            <a:schemeClr val="accent1"/>
+          </a:fillRef>
+          <a:effectRef idx="2">
+            <a:schemeClr val="accent1"/>
+          </a:effectRef>
+          <a:fontRef idx="minor">
+            <a:schemeClr val="lt1"/>
+          </a:fontRef>
+        </p:style>
+        <p:txBody>
+          <a:bodyPr rtlCol="0" anchor="ctr"/>
+          <a:lstStyle/>
+          <a:p>
+            <a:pPr algn="ctr"/>
+          </a:p>
+        </p:txBody>
+      </p:sp>
+      <p:sp>
+        <p:nvSpPr>
+          <p:cNvPr id="3" name="TextBox 2"/>
+          <p:cNvSpPr txBox="1"/>
+          <p:nvPr/>
+        </p:nvSpPr>
+        <p:spPr>
+          <a:xfrm>
+            <a:off x="566928" y="438912"/>
+            <a:ext cx="10881360" cy="502920"/>
+          </a:xfrm>
+          <a:prstGeom prst="rect">
+            <a:avLst/>
+          </a:prstGeom>
+          <a:noFill/>
+        </p:spPr>
+        <p:txBody>
+          <a:bodyPr wrap="square" lIns="54864" rIns="54864" tIns="27432" bIns="27432" anchor="t">
+            <a:spAutoFit/>
+          </a:bodyPr>
+          <a:lstStyle/>
+          <a:p>
+            <a:pPr algn="l"/>
+            <a:r>
+              <a:rPr sz="2700" b="1">
+                <a:solidFill>
+                  <a:srgbClr val="142E4E"/>
+                </a:solidFill>
+                <a:latin typeface="Microsoft JhengHei"/>
+              </a:rPr>
+              <a:t>圖 31｜系統管理員角色功能架構圖</a:t>
+            </a:r>
+          </a:p>
+        </p:txBody>
+      </p:sp>
+      <p:sp>
+        <p:nvSpPr>
+          <p:cNvPr id="4" name="TextBox 3"/>
+          <p:cNvSpPr txBox="1"/>
+          <p:nvPr/>
+        </p:nvSpPr>
+        <p:spPr>
+          <a:xfrm>
+            <a:off x="10378440" y="512064"/>
+            <a:ext cx="1234440" cy="228600"/>
+          </a:xfrm>
+          <a:prstGeom prst="rect">
+            <a:avLst/>
+          </a:prstGeom>
+          <a:noFill/>
+        </p:spPr>
+        <p:txBody>
+          <a:bodyPr wrap="square" lIns="54864" rIns="54864" tIns="27432" bIns="27432" anchor="t">
+            <a:spAutoFit/>
+          </a:bodyPr>
+          <a:lstStyle/>
+          <a:p>
+            <a:pPr algn="r"/>
+            <a:r>
+              <a:rPr sz="900" b="1">
+                <a:solidFill>
+                  <a:srgbClr val="208985"/>
+                </a:solidFill>
+                <a:latin typeface="Microsoft JhengHei"/>
+              </a:rPr>
+              <a:t>流程圖附錄</a:t>
+            </a:r>
+          </a:p>
+        </p:txBody>
+      </p:sp>
+      <p:sp>
+        <p:nvSpPr>
+          <p:cNvPr id="5" name="TextBox 4"/>
+          <p:cNvSpPr txBox="1"/>
+          <p:nvPr/>
+        </p:nvSpPr>
+        <p:spPr>
+          <a:xfrm>
+            <a:off x="566928" y="6565392"/>
+            <a:ext cx="7772400" cy="182880"/>
+          </a:xfrm>
+          <a:prstGeom prst="rect">
+            <a:avLst/>
+          </a:prstGeom>
+          <a:noFill/>
+        </p:spPr>
+        <p:txBody>
+          <a:bodyPr wrap="square" lIns="54864" rIns="54864" tIns="27432" bIns="27432" anchor="t">
+            <a:spAutoFit/>
+          </a:bodyPr>
+          <a:lstStyle/>
+          <a:p>
+            <a:pPr algn="l"/>
+            <a:r>
+              <a:rPr sz="800" b="0">
+                <a:solidFill>
+                  <a:srgbClr val="5D6B79"/>
+                </a:solidFill>
+                <a:latin typeface="Microsoft JhengHei"/>
+              </a:rPr>
+              <a:t>資管科智慧學習歷程系統｜指導老師討論版</a:t>
+            </a:r>
+          </a:p>
+        </p:txBody>
+      </p:sp>
+      <p:sp>
+        <p:nvSpPr>
+          <p:cNvPr id="6" name="TextBox 5"/>
+          <p:cNvSpPr txBox="1"/>
+          <p:nvPr/>
+        </p:nvSpPr>
+        <p:spPr>
+          <a:xfrm>
+            <a:off x="731520" y="1554480"/>
+            <a:ext cx="10698480" cy="457200"/>
+          </a:xfrm>
+          <a:prstGeom prst="rect">
+            <a:avLst/>
+          </a:prstGeom>
+          <a:noFill/>
+        </p:spPr>
+        <p:txBody>
+          <a:bodyPr wrap="square" lIns="54864" rIns="54864" tIns="27432" bIns="27432" anchor="t">
+            <a:spAutoFit/>
+          </a:bodyPr>
+          <a:lstStyle/>
+          <a:p>
+            <a:pPr algn="ctr"/>
+            <a:r>
+              <a:rPr sz="2800" b="1">
+                <a:solidFill>
+                  <a:srgbClr val="142E4E"/>
+                </a:solidFill>
+                <a:latin typeface="Microsoft JhengHei"/>
+              </a:rPr>
+              <a:t>此頁保留圖名與貼圖位置</a:t>
+            </a:r>
+          </a:p>
+        </p:txBody>
+      </p:sp>
+      <p:sp>
+        <p:nvSpPr>
+          <p:cNvPr id="7" name="TextBox 6"/>
+          <p:cNvSpPr txBox="1"/>
+          <p:nvPr/>
+        </p:nvSpPr>
+        <p:spPr>
+          <a:xfrm>
+            <a:off x="731520" y="2331720"/>
+            <a:ext cx="10698480" cy="320040"/>
+          </a:xfrm>
+          <a:prstGeom prst="rect">
+            <a:avLst/>
+          </a:prstGeom>
+          <a:noFill/>
+        </p:spPr>
+        <p:txBody>
+          <a:bodyPr wrap="square" lIns="54864" rIns="54864" tIns="27432" bIns="27432" anchor="t">
+            <a:spAutoFit/>
+          </a:bodyPr>
+          <a:lstStyle/>
+          <a:p>
+            <a:pPr algn="ctr"/>
+            <a:r>
+              <a:rPr sz="1700" b="0">
+                <a:solidFill>
+                  <a:srgbClr val="5D6B79"/>
+                </a:solidFill>
+                <a:latin typeface="Microsoft JhengHei"/>
+              </a:rPr>
+              <a:t>圖稿原始碼：docs/images/D-34-admin-role-architecture.mmd</a:t>
+            </a:r>
+          </a:p>
+        </p:txBody>
+      </p:sp>
+      <p:sp>
+        <p:nvSpPr>
+          <p:cNvPr id="8" name="TextBox 7"/>
+          <p:cNvSpPr txBox="1"/>
+          <p:nvPr/>
+        </p:nvSpPr>
+        <p:spPr>
+          <a:xfrm>
+            <a:off x="731520" y="2971800"/>
+            <a:ext cx="10698480" cy="411480"/>
+          </a:xfrm>
+          <a:prstGeom prst="rect">
+            <a:avLst/>
+          </a:prstGeom>
+          <a:noFill/>
+        </p:spPr>
+        <p:txBody>
+          <a:bodyPr wrap="square" lIns="54864" rIns="54864" tIns="27432" bIns="27432" anchor="t">
+            <a:spAutoFit/>
+          </a:bodyPr>
+          <a:lstStyle/>
+          <a:p>
+            <a:pPr algn="ctr"/>
+            <a:r>
+              <a:rPr sz="1700" b="0">
+                <a:solidFill>
+                  <a:srgbClr val="5D6B79"/>
+                </a:solidFill>
+                <a:latin typeface="Microsoft JhengHei"/>
+              </a:rPr>
+              <a:t>目前環境尚未輸出 PNG；可將對應圖檔貼到此頁後，再上傳雲端或 Canva。</a:t>
+            </a:r>
+          </a:p>
+        </p:txBody>
+      </p:sp>
+    </p:spTree>
+  </p:cSld>
+  <p:clrMapOvr>
+    <a:masterClrMapping/>
+  </p:clrMapOvr>
+</p:sld>
+</file>
+
+<file path=ppt/slides/slide35.xml><?xml version="1.0" encoding="utf-8"?>
+<p:sld xmlns:a="http://schemas.openxmlformats.org/drawingml/2006/main" xmlns:p="http://schemas.openxmlformats.org/presentationml/2006/main" xmlns:r="http://schemas.openxmlformats.org/officeDocument/2006/relationships">
+  <p:cSld>
+    <p:bg>
+      <p:bgPr>
+        <a:solidFill>
+          <a:srgbClr val="FFFFFF"/>
+        </a:solidFill>
+        <a:effectLst/>
+      </p:bgPr>
+    </p:bg>
+    <p:spTree>
+      <p:nvGrpSpPr>
+        <p:cNvPr id="1" name=""/>
+        <p:cNvGrpSpPr/>
+        <p:nvPr/>
+      </p:nvGrpSpPr>
+      <p:grpSpPr/>
+      <p:sp>
+        <p:nvSpPr>
+          <p:cNvPr id="2" name="Rectangle 1"/>
+          <p:cNvSpPr/>
+          <p:nvPr/>
+        </p:nvSpPr>
+        <p:spPr>
+          <a:xfrm>
+            <a:off x="0" y="0"/>
+            <a:ext cx="12191695" cy="164592"/>
+          </a:xfrm>
+          <a:prstGeom prst="rect">
+            <a:avLst/>
+          </a:prstGeom>
+          <a:solidFill>
+            <a:srgbClr val="208985"/>
+          </a:solidFill>
+          <a:ln>
+            <a:noFill/>
+          </a:ln>
+        </p:spPr>
+        <p:style>
+          <a:lnRef idx="1">
+            <a:schemeClr val="accent1"/>
+          </a:lnRef>
+          <a:fillRef idx="3">
+            <a:schemeClr val="accent1"/>
+          </a:fillRef>
+          <a:effectRef idx="2">
+            <a:schemeClr val="accent1"/>
+          </a:effectRef>
+          <a:fontRef idx="minor">
+            <a:schemeClr val="lt1"/>
+          </a:fontRef>
+        </p:style>
+        <p:txBody>
+          <a:bodyPr rtlCol="0" anchor="ctr"/>
+          <a:lstStyle/>
+          <a:p>
+            <a:pPr algn="ctr"/>
+          </a:p>
+        </p:txBody>
+      </p:sp>
+      <p:sp>
+        <p:nvSpPr>
+          <p:cNvPr id="3" name="TextBox 2"/>
+          <p:cNvSpPr txBox="1"/>
+          <p:nvPr/>
+        </p:nvSpPr>
+        <p:spPr>
+          <a:xfrm>
+            <a:off x="566928" y="438912"/>
+            <a:ext cx="10881360" cy="502920"/>
+          </a:xfrm>
+          <a:prstGeom prst="rect">
+            <a:avLst/>
+          </a:prstGeom>
+          <a:noFill/>
+        </p:spPr>
+        <p:txBody>
+          <a:bodyPr wrap="square" lIns="54864" rIns="54864" tIns="27432" bIns="27432" anchor="t">
+            <a:spAutoFit/>
+          </a:bodyPr>
+          <a:lstStyle/>
+          <a:p>
+            <a:pPr algn="l"/>
+            <a:r>
+              <a:rPr sz="2700" b="1">
+                <a:solidFill>
+                  <a:srgbClr val="142E4E"/>
+                </a:solidFill>
+                <a:latin typeface="Microsoft JhengHei"/>
+              </a:rPr>
+              <a:t>圖 32｜角色／功能權限表</a:t>
+            </a:r>
+          </a:p>
+        </p:txBody>
+      </p:sp>
+      <p:sp>
+        <p:nvSpPr>
+          <p:cNvPr id="4" name="TextBox 3"/>
+          <p:cNvSpPr txBox="1"/>
+          <p:nvPr/>
+        </p:nvSpPr>
+        <p:spPr>
+          <a:xfrm>
+            <a:off x="10378440" y="512064"/>
+            <a:ext cx="1234440" cy="228600"/>
+          </a:xfrm>
+          <a:prstGeom prst="rect">
+            <a:avLst/>
+          </a:prstGeom>
+          <a:noFill/>
+        </p:spPr>
+        <p:txBody>
+          <a:bodyPr wrap="square" lIns="54864" rIns="54864" tIns="27432" bIns="27432" anchor="t">
+            <a:spAutoFit/>
+          </a:bodyPr>
+          <a:lstStyle/>
+          <a:p>
+            <a:pPr algn="r"/>
+            <a:r>
+              <a:rPr sz="900" b="1">
+                <a:solidFill>
+                  <a:srgbClr val="208985"/>
+                </a:solidFill>
+                <a:latin typeface="Microsoft JhengHei"/>
+              </a:rPr>
+              <a:t>流程圖附錄</a:t>
+            </a:r>
+          </a:p>
+        </p:txBody>
+      </p:sp>
+      <p:sp>
+        <p:nvSpPr>
+          <p:cNvPr id="5" name="TextBox 4"/>
+          <p:cNvSpPr txBox="1"/>
+          <p:nvPr/>
+        </p:nvSpPr>
+        <p:spPr>
+          <a:xfrm>
+            <a:off x="566928" y="6565392"/>
+            <a:ext cx="7772400" cy="182880"/>
+          </a:xfrm>
+          <a:prstGeom prst="rect">
+            <a:avLst/>
+          </a:prstGeom>
+          <a:noFill/>
+        </p:spPr>
+        <p:txBody>
+          <a:bodyPr wrap="square" lIns="54864" rIns="54864" tIns="27432" bIns="27432" anchor="t">
+            <a:spAutoFit/>
+          </a:bodyPr>
+          <a:lstStyle/>
+          <a:p>
+            <a:pPr algn="l"/>
+            <a:r>
+              <a:rPr sz="800" b="0">
+                <a:solidFill>
+                  <a:srgbClr val="5D6B79"/>
+                </a:solidFill>
+                <a:latin typeface="Microsoft JhengHei"/>
+              </a:rPr>
+              <a:t>資管科智慧學習歷程系統｜指導老師討論版</a:t>
+            </a:r>
+          </a:p>
+        </p:txBody>
+      </p:sp>
+      <p:sp>
+        <p:nvSpPr>
+          <p:cNvPr id="6" name="TextBox 5"/>
+          <p:cNvSpPr txBox="1"/>
+          <p:nvPr/>
+        </p:nvSpPr>
+        <p:spPr>
+          <a:xfrm>
+            <a:off x="731520" y="1554480"/>
+            <a:ext cx="10698480" cy="457200"/>
+          </a:xfrm>
+          <a:prstGeom prst="rect">
+            <a:avLst/>
+          </a:prstGeom>
+          <a:noFill/>
+        </p:spPr>
+        <p:txBody>
+          <a:bodyPr wrap="square" lIns="54864" rIns="54864" tIns="27432" bIns="27432" anchor="t">
+            <a:spAutoFit/>
+          </a:bodyPr>
+          <a:lstStyle/>
+          <a:p>
+            <a:pPr algn="ctr"/>
+            <a:r>
+              <a:rPr sz="2800" b="1">
+                <a:solidFill>
+                  <a:srgbClr val="142E4E"/>
+                </a:solidFill>
+                <a:latin typeface="Microsoft JhengHei"/>
+              </a:rPr>
+              <a:t>此頁保留圖名與貼圖位置</a:t>
+            </a:r>
+          </a:p>
+        </p:txBody>
+      </p:sp>
+      <p:sp>
+        <p:nvSpPr>
+          <p:cNvPr id="7" name="TextBox 6"/>
+          <p:cNvSpPr txBox="1"/>
+          <p:nvPr/>
+        </p:nvSpPr>
+        <p:spPr>
+          <a:xfrm>
+            <a:off x="731520" y="2331720"/>
+            <a:ext cx="10698480" cy="320040"/>
+          </a:xfrm>
+          <a:prstGeom prst="rect">
+            <a:avLst/>
+          </a:prstGeom>
+          <a:noFill/>
+        </p:spPr>
+        <p:txBody>
+          <a:bodyPr wrap="square" lIns="54864" rIns="54864" tIns="27432" bIns="27432" anchor="t">
+            <a:spAutoFit/>
+          </a:bodyPr>
+          <a:lstStyle/>
+          <a:p>
+            <a:pPr algn="ctr"/>
+            <a:r>
+              <a:rPr sz="1700" b="0">
+                <a:solidFill>
+                  <a:srgbClr val="5D6B79"/>
+                </a:solidFill>
+                <a:latin typeface="Microsoft JhengHei"/>
+              </a:rPr>
+              <a:t>圖稿原始碼：docs/images/D-35-permission-matrix.mmd</a:t>
+            </a:r>
+          </a:p>
+        </p:txBody>
+      </p:sp>
+      <p:sp>
+        <p:nvSpPr>
+          <p:cNvPr id="8" name="TextBox 7"/>
+          <p:cNvSpPr txBox="1"/>
+          <p:nvPr/>
+        </p:nvSpPr>
+        <p:spPr>
+          <a:xfrm>
+            <a:off x="731520" y="2971800"/>
+            <a:ext cx="10698480" cy="411480"/>
+          </a:xfrm>
+          <a:prstGeom prst="rect">
+            <a:avLst/>
+          </a:prstGeom>
+          <a:noFill/>
+        </p:spPr>
+        <p:txBody>
+          <a:bodyPr wrap="square" lIns="54864" rIns="54864" tIns="27432" bIns="27432" anchor="t">
+            <a:spAutoFit/>
+          </a:bodyPr>
+          <a:lstStyle/>
+          <a:p>
+            <a:pPr algn="ctr"/>
+            <a:r>
+              <a:rPr sz="1700" b="0">
+                <a:solidFill>
+                  <a:srgbClr val="5D6B79"/>
+                </a:solidFill>
+                <a:latin typeface="Microsoft JhengHei"/>
+              </a:rPr>
+              <a:t>目前環境尚未輸出 PNG；可將對應圖檔貼到此頁後，再上傳雲端或 Canva。</a:t>
+            </a:r>
+          </a:p>
+        </p:txBody>
+      </p:sp>
+    </p:spTree>
+  </p:cSld>
+  <p:clrMapOvr>
+    <a:masterClrMapping/>
+  </p:clrMapOvr>
+</p:sld>
+</file>
+
+<file path=ppt/slides/slide36.xml><?xml version="1.0" encoding="utf-8"?>
+<p:sld xmlns:a="http://schemas.openxmlformats.org/drawingml/2006/main" xmlns:p="http://schemas.openxmlformats.org/presentationml/2006/main" xmlns:r="http://schemas.openxmlformats.org/officeDocument/2006/relationships">
+  <p:cSld>
+    <p:bg>
+      <p:bgPr>
+        <a:solidFill>
+          <a:srgbClr val="FFFFFF"/>
+        </a:solidFill>
+        <a:effectLst/>
+      </p:bgPr>
+    </p:bg>
+    <p:spTree>
+      <p:nvGrpSpPr>
+        <p:cNvPr id="1" name=""/>
+        <p:cNvGrpSpPr/>
+        <p:nvPr/>
+      </p:nvGrpSpPr>
+      <p:grpSpPr/>
+      <p:sp>
+        <p:nvSpPr>
+          <p:cNvPr id="2" name="Rectangle 1"/>
+          <p:cNvSpPr/>
+          <p:nvPr/>
+        </p:nvSpPr>
+        <p:spPr>
+          <a:xfrm>
+            <a:off x="0" y="0"/>
+            <a:ext cx="12191695" cy="164592"/>
+          </a:xfrm>
+          <a:prstGeom prst="rect">
+            <a:avLst/>
+          </a:prstGeom>
+          <a:solidFill>
+            <a:srgbClr val="208985"/>
+          </a:solidFill>
+          <a:ln>
+            <a:noFill/>
+          </a:ln>
+        </p:spPr>
+        <p:style>
+          <a:lnRef idx="1">
+            <a:schemeClr val="accent1"/>
+          </a:lnRef>
+          <a:fillRef idx="3">
+            <a:schemeClr val="accent1"/>
+          </a:fillRef>
+          <a:effectRef idx="2">
+            <a:schemeClr val="accent1"/>
+          </a:effectRef>
+          <a:fontRef idx="minor">
+            <a:schemeClr val="lt1"/>
+          </a:fontRef>
+        </p:style>
+        <p:txBody>
+          <a:bodyPr rtlCol="0" anchor="ctr"/>
+          <a:lstStyle/>
+          <a:p>
+            <a:pPr algn="ctr"/>
+          </a:p>
+        </p:txBody>
+      </p:sp>
+      <p:sp>
+        <p:nvSpPr>
+          <p:cNvPr id="3" name="TextBox 2"/>
+          <p:cNvSpPr txBox="1"/>
+          <p:nvPr/>
+        </p:nvSpPr>
+        <p:spPr>
+          <a:xfrm>
+            <a:off x="566928" y="438912"/>
+            <a:ext cx="10881360" cy="502920"/>
+          </a:xfrm>
+          <a:prstGeom prst="rect">
+            <a:avLst/>
+          </a:prstGeom>
+          <a:noFill/>
+        </p:spPr>
+        <p:txBody>
+          <a:bodyPr wrap="square" lIns="54864" rIns="54864" tIns="27432" bIns="27432" anchor="t">
+            <a:spAutoFit/>
+          </a:bodyPr>
+          <a:lstStyle/>
+          <a:p>
+            <a:pPr algn="l"/>
+            <a:r>
+              <a:rPr sz="2700" b="1">
+                <a:solidFill>
+                  <a:srgbClr val="142E4E"/>
+                </a:solidFill>
+                <a:latin typeface="Microsoft JhengHei"/>
+              </a:rPr>
+              <a:t>圖 33｜學生細部功能流程圖</a:t>
+            </a:r>
+          </a:p>
+        </p:txBody>
+      </p:sp>
+      <p:sp>
+        <p:nvSpPr>
+          <p:cNvPr id="4" name="TextBox 3"/>
+          <p:cNvSpPr txBox="1"/>
+          <p:nvPr/>
+        </p:nvSpPr>
+        <p:spPr>
+          <a:xfrm>
+            <a:off x="10378440" y="512064"/>
+            <a:ext cx="1234440" cy="228600"/>
+          </a:xfrm>
+          <a:prstGeom prst="rect">
+            <a:avLst/>
+          </a:prstGeom>
+          <a:noFill/>
+        </p:spPr>
+        <p:txBody>
+          <a:bodyPr wrap="square" lIns="54864" rIns="54864" tIns="27432" bIns="27432" anchor="t">
+            <a:spAutoFit/>
+          </a:bodyPr>
+          <a:lstStyle/>
+          <a:p>
+            <a:pPr algn="r"/>
+            <a:r>
+              <a:rPr sz="900" b="1">
+                <a:solidFill>
+                  <a:srgbClr val="208985"/>
+                </a:solidFill>
+                <a:latin typeface="Microsoft JhengHei"/>
+              </a:rPr>
+              <a:t>流程圖附錄</a:t>
+            </a:r>
+          </a:p>
+        </p:txBody>
+      </p:sp>
+      <p:sp>
+        <p:nvSpPr>
+          <p:cNvPr id="5" name="TextBox 4"/>
+          <p:cNvSpPr txBox="1"/>
+          <p:nvPr/>
+        </p:nvSpPr>
+        <p:spPr>
+          <a:xfrm>
+            <a:off x="566928" y="6565392"/>
+            <a:ext cx="7772400" cy="182880"/>
+          </a:xfrm>
+          <a:prstGeom prst="rect">
+            <a:avLst/>
+          </a:prstGeom>
+          <a:noFill/>
+        </p:spPr>
+        <p:txBody>
+          <a:bodyPr wrap="square" lIns="54864" rIns="54864" tIns="27432" bIns="27432" anchor="t">
+            <a:spAutoFit/>
+          </a:bodyPr>
+          <a:lstStyle/>
+          <a:p>
+            <a:pPr algn="l"/>
+            <a:r>
+              <a:rPr sz="800" b="0">
+                <a:solidFill>
+                  <a:srgbClr val="5D6B79"/>
+                </a:solidFill>
+                <a:latin typeface="Microsoft JhengHei"/>
+              </a:rPr>
+              <a:t>資管科智慧學習歷程系統｜指導老師討論版</a:t>
+            </a:r>
+          </a:p>
+        </p:txBody>
+      </p:sp>
+      <p:sp>
+        <p:nvSpPr>
+          <p:cNvPr id="6" name="TextBox 5"/>
+          <p:cNvSpPr txBox="1"/>
+          <p:nvPr/>
+        </p:nvSpPr>
+        <p:spPr>
+          <a:xfrm>
+            <a:off x="731520" y="1554480"/>
+            <a:ext cx="10698480" cy="457200"/>
+          </a:xfrm>
+          <a:prstGeom prst="rect">
+            <a:avLst/>
+          </a:prstGeom>
+          <a:noFill/>
+        </p:spPr>
+        <p:txBody>
+          <a:bodyPr wrap="square" lIns="54864" rIns="54864" tIns="27432" bIns="27432" anchor="t">
+            <a:spAutoFit/>
+          </a:bodyPr>
+          <a:lstStyle/>
+          <a:p>
+            <a:pPr algn="ctr"/>
+            <a:r>
+              <a:rPr sz="2800" b="1">
+                <a:solidFill>
+                  <a:srgbClr val="142E4E"/>
+                </a:solidFill>
+                <a:latin typeface="Microsoft JhengHei"/>
+              </a:rPr>
+              <a:t>此頁保留圖名與貼圖位置</a:t>
+            </a:r>
+          </a:p>
+        </p:txBody>
+      </p:sp>
+      <p:sp>
+        <p:nvSpPr>
+          <p:cNvPr id="7" name="TextBox 6"/>
+          <p:cNvSpPr txBox="1"/>
+          <p:nvPr/>
+        </p:nvSpPr>
+        <p:spPr>
+          <a:xfrm>
+            <a:off x="731520" y="2331720"/>
+            <a:ext cx="10698480" cy="320040"/>
+          </a:xfrm>
+          <a:prstGeom prst="rect">
+            <a:avLst/>
+          </a:prstGeom>
+          <a:noFill/>
+        </p:spPr>
+        <p:txBody>
+          <a:bodyPr wrap="square" lIns="54864" rIns="54864" tIns="27432" bIns="27432" anchor="t">
+            <a:spAutoFit/>
+          </a:bodyPr>
+          <a:lstStyle/>
+          <a:p>
+            <a:pPr algn="ctr"/>
+            <a:r>
+              <a:rPr sz="1700" b="0">
+                <a:solidFill>
+                  <a:srgbClr val="5D6B79"/>
+                </a:solidFill>
+                <a:latin typeface="Microsoft JhengHei"/>
+              </a:rPr>
+              <a:t>圖稿原始碼：docs/images/D-36-student-detailed-flow.mmd</a:t>
+            </a:r>
+          </a:p>
+        </p:txBody>
+      </p:sp>
+      <p:sp>
+        <p:nvSpPr>
+          <p:cNvPr id="8" name="TextBox 7"/>
+          <p:cNvSpPr txBox="1"/>
+          <p:nvPr/>
+        </p:nvSpPr>
+        <p:spPr>
+          <a:xfrm>
+            <a:off x="731520" y="2971800"/>
+            <a:ext cx="10698480" cy="411480"/>
+          </a:xfrm>
+          <a:prstGeom prst="rect">
+            <a:avLst/>
+          </a:prstGeom>
+          <a:noFill/>
+        </p:spPr>
+        <p:txBody>
+          <a:bodyPr wrap="square" lIns="54864" rIns="54864" tIns="27432" bIns="27432" anchor="t">
+            <a:spAutoFit/>
+          </a:bodyPr>
+          <a:lstStyle/>
+          <a:p>
+            <a:pPr algn="ctr"/>
+            <a:r>
+              <a:rPr sz="1700" b="0">
+                <a:solidFill>
+                  <a:srgbClr val="5D6B79"/>
+                </a:solidFill>
+                <a:latin typeface="Microsoft JhengHei"/>
+              </a:rPr>
+              <a:t>目前環境尚未輸出 PNG；可將對應圖檔貼到此頁後，再上傳雲端或 Canva。</a:t>
+            </a:r>
+          </a:p>
+        </p:txBody>
+      </p:sp>
+    </p:spTree>
+  </p:cSld>
+  <p:clrMapOvr>
+    <a:masterClrMapping/>
+  </p:clrMapOvr>
+</p:sld>
+</file>
+
+<file path=ppt/slides/slide37.xml><?xml version="1.0" encoding="utf-8"?>
+<p:sld xmlns:a="http://schemas.openxmlformats.org/drawingml/2006/main" xmlns:p="http://schemas.openxmlformats.org/presentationml/2006/main" xmlns:r="http://schemas.openxmlformats.org/officeDocument/2006/relationships">
+  <p:cSld>
+    <p:bg>
+      <p:bgPr>
+        <a:solidFill>
+          <a:srgbClr val="FFFFFF"/>
+        </a:solidFill>
+        <a:effectLst/>
+      </p:bgPr>
+    </p:bg>
+    <p:spTree>
+      <p:nvGrpSpPr>
+        <p:cNvPr id="1" name=""/>
+        <p:cNvGrpSpPr/>
+        <p:nvPr/>
+      </p:nvGrpSpPr>
+      <p:grpSpPr/>
+      <p:sp>
+        <p:nvSpPr>
+          <p:cNvPr id="2" name="Rectangle 1"/>
+          <p:cNvSpPr/>
+          <p:nvPr/>
+        </p:nvSpPr>
+        <p:spPr>
+          <a:xfrm>
+            <a:off x="0" y="0"/>
+            <a:ext cx="12191695" cy="164592"/>
+          </a:xfrm>
+          <a:prstGeom prst="rect">
+            <a:avLst/>
+          </a:prstGeom>
+          <a:solidFill>
+            <a:srgbClr val="208985"/>
+          </a:solidFill>
+          <a:ln>
+            <a:noFill/>
+          </a:ln>
+        </p:spPr>
+        <p:style>
+          <a:lnRef idx="1">
+            <a:schemeClr val="accent1"/>
+          </a:lnRef>
+          <a:fillRef idx="3">
+            <a:schemeClr val="accent1"/>
+          </a:fillRef>
+          <a:effectRef idx="2">
+            <a:schemeClr val="accent1"/>
+          </a:effectRef>
+          <a:fontRef idx="minor">
+            <a:schemeClr val="lt1"/>
+          </a:fontRef>
+        </p:style>
+        <p:txBody>
+          <a:bodyPr rtlCol="0" anchor="ctr"/>
+          <a:lstStyle/>
+          <a:p>
+            <a:pPr algn="ctr"/>
+          </a:p>
+        </p:txBody>
+      </p:sp>
+      <p:sp>
+        <p:nvSpPr>
+          <p:cNvPr id="3" name="TextBox 2"/>
+          <p:cNvSpPr txBox="1"/>
+          <p:nvPr/>
+        </p:nvSpPr>
+        <p:spPr>
+          <a:xfrm>
+            <a:off x="566928" y="438912"/>
+            <a:ext cx="10881360" cy="502920"/>
+          </a:xfrm>
+          <a:prstGeom prst="rect">
+            <a:avLst/>
+          </a:prstGeom>
+          <a:noFill/>
+        </p:spPr>
+        <p:txBody>
+          <a:bodyPr wrap="square" lIns="54864" rIns="54864" tIns="27432" bIns="27432" anchor="t">
+            <a:spAutoFit/>
+          </a:bodyPr>
+          <a:lstStyle/>
+          <a:p>
+            <a:pPr algn="l"/>
+            <a:r>
+              <a:rPr sz="2700" b="1">
+                <a:solidFill>
+                  <a:srgbClr val="142E4E"/>
+                </a:solidFill>
+                <a:latin typeface="Microsoft JhengHei"/>
+              </a:rPr>
+              <a:t>圖 34｜教師／導師細部功能流程圖</a:t>
+            </a:r>
+          </a:p>
+        </p:txBody>
+      </p:sp>
+      <p:sp>
+        <p:nvSpPr>
+          <p:cNvPr id="4" name="TextBox 3"/>
+          <p:cNvSpPr txBox="1"/>
+          <p:nvPr/>
+        </p:nvSpPr>
+        <p:spPr>
+          <a:xfrm>
+            <a:off x="10378440" y="512064"/>
+            <a:ext cx="1234440" cy="228600"/>
+          </a:xfrm>
+          <a:prstGeom prst="rect">
+            <a:avLst/>
+          </a:prstGeom>
+          <a:noFill/>
+        </p:spPr>
+        <p:txBody>
+          <a:bodyPr wrap="square" lIns="54864" rIns="54864" tIns="27432" bIns="27432" anchor="t">
+            <a:spAutoFit/>
+          </a:bodyPr>
+          <a:lstStyle/>
+          <a:p>
+            <a:pPr algn="r"/>
+            <a:r>
+              <a:rPr sz="900" b="1">
+                <a:solidFill>
+                  <a:srgbClr val="208985"/>
+                </a:solidFill>
+                <a:latin typeface="Microsoft JhengHei"/>
+              </a:rPr>
+              <a:t>流程圖附錄</a:t>
+            </a:r>
+          </a:p>
+        </p:txBody>
+      </p:sp>
+      <p:sp>
+        <p:nvSpPr>
+          <p:cNvPr id="5" name="TextBox 4"/>
+          <p:cNvSpPr txBox="1"/>
+          <p:nvPr/>
+        </p:nvSpPr>
+        <p:spPr>
+          <a:xfrm>
+            <a:off x="566928" y="6565392"/>
+            <a:ext cx="7772400" cy="182880"/>
+          </a:xfrm>
+          <a:prstGeom prst="rect">
+            <a:avLst/>
+          </a:prstGeom>
+          <a:noFill/>
+        </p:spPr>
+        <p:txBody>
+          <a:bodyPr wrap="square" lIns="54864" rIns="54864" tIns="27432" bIns="27432" anchor="t">
+            <a:spAutoFit/>
+          </a:bodyPr>
+          <a:lstStyle/>
+          <a:p>
+            <a:pPr algn="l"/>
+            <a:r>
+              <a:rPr sz="800" b="0">
+                <a:solidFill>
+                  <a:srgbClr val="5D6B79"/>
+                </a:solidFill>
+                <a:latin typeface="Microsoft JhengHei"/>
+              </a:rPr>
+              <a:t>資管科智慧學習歷程系統｜指導老師討論版</a:t>
+            </a:r>
+          </a:p>
+        </p:txBody>
+      </p:sp>
+      <p:sp>
+        <p:nvSpPr>
+          <p:cNvPr id="6" name="TextBox 5"/>
+          <p:cNvSpPr txBox="1"/>
+          <p:nvPr/>
+        </p:nvSpPr>
+        <p:spPr>
+          <a:xfrm>
+            <a:off x="731520" y="1554480"/>
+            <a:ext cx="10698480" cy="457200"/>
+          </a:xfrm>
+          <a:prstGeom prst="rect">
+            <a:avLst/>
+          </a:prstGeom>
+          <a:noFill/>
+        </p:spPr>
+        <p:txBody>
+          <a:bodyPr wrap="square" lIns="54864" rIns="54864" tIns="27432" bIns="27432" anchor="t">
+            <a:spAutoFit/>
+          </a:bodyPr>
+          <a:lstStyle/>
+          <a:p>
+            <a:pPr algn="ctr"/>
+            <a:r>
+              <a:rPr sz="2800" b="1">
+                <a:solidFill>
+                  <a:srgbClr val="142E4E"/>
+                </a:solidFill>
+                <a:latin typeface="Microsoft JhengHei"/>
+              </a:rPr>
+              <a:t>此頁保留圖名與貼圖位置</a:t>
+            </a:r>
+          </a:p>
+        </p:txBody>
+      </p:sp>
+      <p:sp>
+        <p:nvSpPr>
+          <p:cNvPr id="7" name="TextBox 6"/>
+          <p:cNvSpPr txBox="1"/>
+          <p:nvPr/>
+        </p:nvSpPr>
+        <p:spPr>
+          <a:xfrm>
+            <a:off x="731520" y="2331720"/>
+            <a:ext cx="10698480" cy="320040"/>
+          </a:xfrm>
+          <a:prstGeom prst="rect">
+            <a:avLst/>
+          </a:prstGeom>
+          <a:noFill/>
+        </p:spPr>
+        <p:txBody>
+          <a:bodyPr wrap="square" lIns="54864" rIns="54864" tIns="27432" bIns="27432" anchor="t">
+            <a:spAutoFit/>
+          </a:bodyPr>
+          <a:lstStyle/>
+          <a:p>
+            <a:pPr algn="ctr"/>
+            <a:r>
+              <a:rPr sz="1700" b="0">
+                <a:solidFill>
+                  <a:srgbClr val="5D6B79"/>
+                </a:solidFill>
+                <a:latin typeface="Microsoft JhengHei"/>
+              </a:rPr>
+              <a:t>圖稿原始碼：docs/images/D-37-teacher-detailed-flow.mmd</a:t>
+            </a:r>
+          </a:p>
+        </p:txBody>
+      </p:sp>
+      <p:sp>
+        <p:nvSpPr>
+          <p:cNvPr id="8" name="TextBox 7"/>
+          <p:cNvSpPr txBox="1"/>
+          <p:nvPr/>
+        </p:nvSpPr>
+        <p:spPr>
+          <a:xfrm>
+            <a:off x="731520" y="2971800"/>
+            <a:ext cx="10698480" cy="411480"/>
+          </a:xfrm>
+          <a:prstGeom prst="rect">
+            <a:avLst/>
+          </a:prstGeom>
+          <a:noFill/>
+        </p:spPr>
+        <p:txBody>
+          <a:bodyPr wrap="square" lIns="54864" rIns="54864" tIns="27432" bIns="27432" anchor="t">
+            <a:spAutoFit/>
+          </a:bodyPr>
+          <a:lstStyle/>
+          <a:p>
+            <a:pPr algn="ctr"/>
+            <a:r>
+              <a:rPr sz="1700" b="0">
+                <a:solidFill>
+                  <a:srgbClr val="5D6B79"/>
+                </a:solidFill>
+                <a:latin typeface="Microsoft JhengHei"/>
+              </a:rPr>
+              <a:t>目前環境尚未輸出 PNG；可將對應圖檔貼到此頁後，再上傳雲端或 Canva。</a:t>
+            </a:r>
+          </a:p>
+        </p:txBody>
+      </p:sp>
+    </p:spTree>
+  </p:cSld>
+  <p:clrMapOvr>
+    <a:masterClrMapping/>
+  </p:clrMapOvr>
+</p:sld>
+</file>
+
+<file path=ppt/slides/slide38.xml><?xml version="1.0" encoding="utf-8"?>
+<p:sld xmlns:a="http://schemas.openxmlformats.org/drawingml/2006/main" xmlns:p="http://schemas.openxmlformats.org/presentationml/2006/main" xmlns:r="http://schemas.openxmlformats.org/officeDocument/2006/relationships">
+  <p:cSld>
+    <p:bg>
+      <p:bgPr>
+        <a:solidFill>
+          <a:srgbClr val="FFFFFF"/>
+        </a:solidFill>
+        <a:effectLst/>
+      </p:bgPr>
+    </p:bg>
+    <p:spTree>
+      <p:nvGrpSpPr>
+        <p:cNvPr id="1" name=""/>
+        <p:cNvGrpSpPr/>
+        <p:nvPr/>
+      </p:nvGrpSpPr>
+      <p:grpSpPr/>
+      <p:sp>
+        <p:nvSpPr>
+          <p:cNvPr id="2" name="Rectangle 1"/>
+          <p:cNvSpPr/>
+          <p:nvPr/>
+        </p:nvSpPr>
+        <p:spPr>
+          <a:xfrm>
+            <a:off x="0" y="0"/>
+            <a:ext cx="12191695" cy="164592"/>
+          </a:xfrm>
+          <a:prstGeom prst="rect">
+            <a:avLst/>
+          </a:prstGeom>
+          <a:solidFill>
+            <a:srgbClr val="208985"/>
+          </a:solidFill>
+          <a:ln>
+            <a:noFill/>
+          </a:ln>
+        </p:spPr>
+        <p:style>
+          <a:lnRef idx="1">
+            <a:schemeClr val="accent1"/>
+          </a:lnRef>
+          <a:fillRef idx="3">
+            <a:schemeClr val="accent1"/>
+          </a:fillRef>
+          <a:effectRef idx="2">
+            <a:schemeClr val="accent1"/>
+          </a:effectRef>
+          <a:fontRef idx="minor">
+            <a:schemeClr val="lt1"/>
+          </a:fontRef>
+        </p:style>
+        <p:txBody>
+          <a:bodyPr rtlCol="0" anchor="ctr"/>
+          <a:lstStyle/>
+          <a:p>
+            <a:pPr algn="ctr"/>
+          </a:p>
+        </p:txBody>
+      </p:sp>
+      <p:sp>
+        <p:nvSpPr>
+          <p:cNvPr id="3" name="TextBox 2"/>
+          <p:cNvSpPr txBox="1"/>
+          <p:nvPr/>
+        </p:nvSpPr>
+        <p:spPr>
+          <a:xfrm>
+            <a:off x="566928" y="438912"/>
+            <a:ext cx="10881360" cy="502920"/>
+          </a:xfrm>
+          <a:prstGeom prst="rect">
+            <a:avLst/>
+          </a:prstGeom>
+          <a:noFill/>
+        </p:spPr>
+        <p:txBody>
+          <a:bodyPr wrap="square" lIns="54864" rIns="54864" tIns="27432" bIns="27432" anchor="t">
+            <a:spAutoFit/>
+          </a:bodyPr>
+          <a:lstStyle/>
+          <a:p>
+            <a:pPr algn="l"/>
+            <a:r>
+              <a:rPr sz="2700" b="1">
+                <a:solidFill>
+                  <a:srgbClr val="142E4E"/>
+                </a:solidFill>
+                <a:latin typeface="Microsoft JhengHei"/>
+              </a:rPr>
+              <a:t>圖 35｜科辦／行政細部功能流程圖</a:t>
+            </a:r>
+          </a:p>
+        </p:txBody>
+      </p:sp>
+      <p:sp>
+        <p:nvSpPr>
+          <p:cNvPr id="4" name="TextBox 3"/>
+          <p:cNvSpPr txBox="1"/>
+          <p:nvPr/>
+        </p:nvSpPr>
+        <p:spPr>
+          <a:xfrm>
+            <a:off x="10378440" y="512064"/>
+            <a:ext cx="1234440" cy="228600"/>
+          </a:xfrm>
+          <a:prstGeom prst="rect">
+            <a:avLst/>
+          </a:prstGeom>
+          <a:noFill/>
+        </p:spPr>
+        <p:txBody>
+          <a:bodyPr wrap="square" lIns="54864" rIns="54864" tIns="27432" bIns="27432" anchor="t">
+            <a:spAutoFit/>
+          </a:bodyPr>
+          <a:lstStyle/>
+          <a:p>
+            <a:pPr algn="r"/>
+            <a:r>
+              <a:rPr sz="900" b="1">
+                <a:solidFill>
+                  <a:srgbClr val="208985"/>
+                </a:solidFill>
+                <a:latin typeface="Microsoft JhengHei"/>
+              </a:rPr>
+              <a:t>流程圖附錄</a:t>
+            </a:r>
+          </a:p>
+        </p:txBody>
+      </p:sp>
+      <p:sp>
+        <p:nvSpPr>
+          <p:cNvPr id="5" name="TextBox 4"/>
+          <p:cNvSpPr txBox="1"/>
+          <p:nvPr/>
+        </p:nvSpPr>
+        <p:spPr>
+          <a:xfrm>
+            <a:off x="566928" y="6565392"/>
+            <a:ext cx="7772400" cy="182880"/>
+          </a:xfrm>
+          <a:prstGeom prst="rect">
+            <a:avLst/>
+          </a:prstGeom>
+          <a:noFill/>
+        </p:spPr>
+        <p:txBody>
+          <a:bodyPr wrap="square" lIns="54864" rIns="54864" tIns="27432" bIns="27432" anchor="t">
+            <a:spAutoFit/>
+          </a:bodyPr>
+          <a:lstStyle/>
+          <a:p>
+            <a:pPr algn="l"/>
+            <a:r>
+              <a:rPr sz="800" b="0">
+                <a:solidFill>
+                  <a:srgbClr val="5D6B79"/>
+                </a:solidFill>
+                <a:latin typeface="Microsoft JhengHei"/>
+              </a:rPr>
+              <a:t>資管科智慧學習歷程系統｜指導老師討論版</a:t>
+            </a:r>
+          </a:p>
+        </p:txBody>
+      </p:sp>
+      <p:sp>
+        <p:nvSpPr>
+          <p:cNvPr id="6" name="TextBox 5"/>
+          <p:cNvSpPr txBox="1"/>
+          <p:nvPr/>
+        </p:nvSpPr>
+        <p:spPr>
+          <a:xfrm>
+            <a:off x="731520" y="1554480"/>
+            <a:ext cx="10698480" cy="457200"/>
+          </a:xfrm>
+          <a:prstGeom prst="rect">
+            <a:avLst/>
+          </a:prstGeom>
+          <a:noFill/>
+        </p:spPr>
+        <p:txBody>
+          <a:bodyPr wrap="square" lIns="54864" rIns="54864" tIns="27432" bIns="27432" anchor="t">
+            <a:spAutoFit/>
+          </a:bodyPr>
+          <a:lstStyle/>
+          <a:p>
+            <a:pPr algn="ctr"/>
+            <a:r>
+              <a:rPr sz="2800" b="1">
+                <a:solidFill>
+                  <a:srgbClr val="142E4E"/>
+                </a:solidFill>
+                <a:latin typeface="Microsoft JhengHei"/>
+              </a:rPr>
+              <a:t>此頁保留圖名與貼圖位置</a:t>
+            </a:r>
+          </a:p>
+        </p:txBody>
+      </p:sp>
+      <p:sp>
+        <p:nvSpPr>
+          <p:cNvPr id="7" name="TextBox 6"/>
+          <p:cNvSpPr txBox="1"/>
+          <p:nvPr/>
+        </p:nvSpPr>
+        <p:spPr>
+          <a:xfrm>
+            <a:off x="731520" y="2331720"/>
+            <a:ext cx="10698480" cy="320040"/>
+          </a:xfrm>
+          <a:prstGeom prst="rect">
+            <a:avLst/>
+          </a:prstGeom>
+          <a:noFill/>
+        </p:spPr>
+        <p:txBody>
+          <a:bodyPr wrap="square" lIns="54864" rIns="54864" tIns="27432" bIns="27432" anchor="t">
+            <a:spAutoFit/>
+          </a:bodyPr>
+          <a:lstStyle/>
+          <a:p>
+            <a:pPr algn="ctr"/>
+            <a:r>
+              <a:rPr sz="1700" b="0">
+                <a:solidFill>
+                  <a:srgbClr val="5D6B79"/>
+                </a:solidFill>
+                <a:latin typeface="Microsoft JhengHei"/>
+              </a:rPr>
+              <a:t>圖稿原始碼：docs/images/D-38-staff-detailed-flow.mmd</a:t>
+            </a:r>
+          </a:p>
+        </p:txBody>
+      </p:sp>
+      <p:sp>
+        <p:nvSpPr>
+          <p:cNvPr id="8" name="TextBox 7"/>
+          <p:cNvSpPr txBox="1"/>
+          <p:nvPr/>
+        </p:nvSpPr>
+        <p:spPr>
+          <a:xfrm>
+            <a:off x="731520" y="2971800"/>
+            <a:ext cx="10698480" cy="411480"/>
+          </a:xfrm>
+          <a:prstGeom prst="rect">
+            <a:avLst/>
+          </a:prstGeom>
+          <a:noFill/>
+        </p:spPr>
+        <p:txBody>
+          <a:bodyPr wrap="square" lIns="54864" rIns="54864" tIns="27432" bIns="27432" anchor="t">
+            <a:spAutoFit/>
+          </a:bodyPr>
+          <a:lstStyle/>
+          <a:p>
+            <a:pPr algn="ctr"/>
+            <a:r>
+              <a:rPr sz="1700" b="0">
+                <a:solidFill>
+                  <a:srgbClr val="5D6B79"/>
+                </a:solidFill>
+                <a:latin typeface="Microsoft JhengHei"/>
+              </a:rPr>
+              <a:t>目前環境尚未輸出 PNG；可將對應圖檔貼到此頁後，再上傳雲端或 Canva。</a:t>
+            </a:r>
+          </a:p>
+        </p:txBody>
+      </p:sp>
+    </p:spTree>
+  </p:cSld>
+  <p:clrMapOvr>
+    <a:masterClrMapping/>
+  </p:clrMapOvr>
+</p:sld>
+</file>
+
+<file path=ppt/slides/slide39.xml><?xml version="1.0" encoding="utf-8"?>
+<p:sld xmlns:a="http://schemas.openxmlformats.org/drawingml/2006/main" xmlns:p="http://schemas.openxmlformats.org/presentationml/2006/main" xmlns:r="http://schemas.openxmlformats.org/officeDocument/2006/relationships">
+  <p:cSld>
+    <p:bg>
+      <p:bgPr>
+        <a:solidFill>
+          <a:srgbClr val="FFFFFF"/>
+        </a:solidFill>
+        <a:effectLst/>
+      </p:bgPr>
+    </p:bg>
+    <p:spTree>
+      <p:nvGrpSpPr>
+        <p:cNvPr id="1" name=""/>
+        <p:cNvGrpSpPr/>
+        <p:nvPr/>
+      </p:nvGrpSpPr>
+      <p:grpSpPr/>
+      <p:sp>
+        <p:nvSpPr>
+          <p:cNvPr id="2" name="Rectangle 1"/>
+          <p:cNvSpPr/>
+          <p:nvPr/>
+        </p:nvSpPr>
+        <p:spPr>
+          <a:xfrm>
+            <a:off x="0" y="0"/>
+            <a:ext cx="12191695" cy="164592"/>
+          </a:xfrm>
+          <a:prstGeom prst="rect">
+            <a:avLst/>
+          </a:prstGeom>
+          <a:solidFill>
+            <a:srgbClr val="208985"/>
+          </a:solidFill>
+          <a:ln>
+            <a:noFill/>
+          </a:ln>
+        </p:spPr>
+        <p:style>
+          <a:lnRef idx="1">
+            <a:schemeClr val="accent1"/>
+          </a:lnRef>
+          <a:fillRef idx="3">
+            <a:schemeClr val="accent1"/>
+          </a:fillRef>
+          <a:effectRef idx="2">
+            <a:schemeClr val="accent1"/>
+          </a:effectRef>
+          <a:fontRef idx="minor">
+            <a:schemeClr val="lt1"/>
+          </a:fontRef>
+        </p:style>
+        <p:txBody>
+          <a:bodyPr rtlCol="0" anchor="ctr"/>
+          <a:lstStyle/>
+          <a:p>
+            <a:pPr algn="ctr"/>
+          </a:p>
+        </p:txBody>
+      </p:sp>
+      <p:sp>
+        <p:nvSpPr>
+          <p:cNvPr id="3" name="TextBox 2"/>
+          <p:cNvSpPr txBox="1"/>
+          <p:nvPr/>
+        </p:nvSpPr>
+        <p:spPr>
+          <a:xfrm>
+            <a:off x="566928" y="438912"/>
+            <a:ext cx="10881360" cy="502920"/>
+          </a:xfrm>
+          <a:prstGeom prst="rect">
+            <a:avLst/>
+          </a:prstGeom>
+          <a:noFill/>
+        </p:spPr>
+        <p:txBody>
+          <a:bodyPr wrap="square" lIns="54864" rIns="54864" tIns="27432" bIns="27432" anchor="t">
+            <a:spAutoFit/>
+          </a:bodyPr>
+          <a:lstStyle/>
+          <a:p>
+            <a:pPr algn="l"/>
+            <a:r>
+              <a:rPr sz="2700" b="1">
+                <a:solidFill>
+                  <a:srgbClr val="142E4E"/>
+                </a:solidFill>
+                <a:latin typeface="Microsoft JhengHei"/>
+              </a:rPr>
+              <a:t>圖 36｜管理員細部功能流程圖</a:t>
+            </a:r>
+          </a:p>
+        </p:txBody>
+      </p:sp>
+      <p:sp>
+        <p:nvSpPr>
+          <p:cNvPr id="4" name="TextBox 3"/>
+          <p:cNvSpPr txBox="1"/>
+          <p:nvPr/>
+        </p:nvSpPr>
+        <p:spPr>
+          <a:xfrm>
+            <a:off x="10378440" y="512064"/>
+            <a:ext cx="1234440" cy="228600"/>
+          </a:xfrm>
+          <a:prstGeom prst="rect">
+            <a:avLst/>
+          </a:prstGeom>
+          <a:noFill/>
+        </p:spPr>
+        <p:txBody>
+          <a:bodyPr wrap="square" lIns="54864" rIns="54864" tIns="27432" bIns="27432" anchor="t">
+            <a:spAutoFit/>
+          </a:bodyPr>
+          <a:lstStyle/>
+          <a:p>
+            <a:pPr algn="r"/>
+            <a:r>
+              <a:rPr sz="900" b="1">
+                <a:solidFill>
+                  <a:srgbClr val="208985"/>
+                </a:solidFill>
+                <a:latin typeface="Microsoft JhengHei"/>
+              </a:rPr>
+              <a:t>流程圖附錄</a:t>
+            </a:r>
+          </a:p>
+        </p:txBody>
+      </p:sp>
+      <p:sp>
+        <p:nvSpPr>
+          <p:cNvPr id="5" name="TextBox 4"/>
+          <p:cNvSpPr txBox="1"/>
+          <p:nvPr/>
+        </p:nvSpPr>
+        <p:spPr>
+          <a:xfrm>
+            <a:off x="566928" y="6565392"/>
+            <a:ext cx="7772400" cy="182880"/>
+          </a:xfrm>
+          <a:prstGeom prst="rect">
+            <a:avLst/>
+          </a:prstGeom>
+          <a:noFill/>
+        </p:spPr>
+        <p:txBody>
+          <a:bodyPr wrap="square" lIns="54864" rIns="54864" tIns="27432" bIns="27432" anchor="t">
+            <a:spAutoFit/>
+          </a:bodyPr>
+          <a:lstStyle/>
+          <a:p>
+            <a:pPr algn="l"/>
+            <a:r>
+              <a:rPr sz="800" b="0">
+                <a:solidFill>
+                  <a:srgbClr val="5D6B79"/>
+                </a:solidFill>
+                <a:latin typeface="Microsoft JhengHei"/>
+              </a:rPr>
+              <a:t>資管科智慧學習歷程系統｜指導老師討論版</a:t>
+            </a:r>
+          </a:p>
+        </p:txBody>
+      </p:sp>
+      <p:sp>
+        <p:nvSpPr>
+          <p:cNvPr id="6" name="TextBox 5"/>
+          <p:cNvSpPr txBox="1"/>
+          <p:nvPr/>
+        </p:nvSpPr>
+        <p:spPr>
+          <a:xfrm>
+            <a:off x="731520" y="1554480"/>
+            <a:ext cx="10698480" cy="457200"/>
+          </a:xfrm>
+          <a:prstGeom prst="rect">
+            <a:avLst/>
+          </a:prstGeom>
+          <a:noFill/>
+        </p:spPr>
+        <p:txBody>
+          <a:bodyPr wrap="square" lIns="54864" rIns="54864" tIns="27432" bIns="27432" anchor="t">
+            <a:spAutoFit/>
+          </a:bodyPr>
+          <a:lstStyle/>
+          <a:p>
+            <a:pPr algn="ctr"/>
+            <a:r>
+              <a:rPr sz="2800" b="1">
+                <a:solidFill>
+                  <a:srgbClr val="142E4E"/>
+                </a:solidFill>
+                <a:latin typeface="Microsoft JhengHei"/>
+              </a:rPr>
+              <a:t>此頁保留圖名與貼圖位置</a:t>
+            </a:r>
+          </a:p>
+        </p:txBody>
+      </p:sp>
+      <p:sp>
+        <p:nvSpPr>
+          <p:cNvPr id="7" name="TextBox 6"/>
+          <p:cNvSpPr txBox="1"/>
+          <p:nvPr/>
+        </p:nvSpPr>
+        <p:spPr>
+          <a:xfrm>
+            <a:off x="731520" y="2331720"/>
+            <a:ext cx="10698480" cy="320040"/>
+          </a:xfrm>
+          <a:prstGeom prst="rect">
+            <a:avLst/>
+          </a:prstGeom>
+          <a:noFill/>
+        </p:spPr>
+        <p:txBody>
+          <a:bodyPr wrap="square" lIns="54864" rIns="54864" tIns="27432" bIns="27432" anchor="t">
+            <a:spAutoFit/>
+          </a:bodyPr>
+          <a:lstStyle/>
+          <a:p>
+            <a:pPr algn="ctr"/>
+            <a:r>
+              <a:rPr sz="1700" b="0">
+                <a:solidFill>
+                  <a:srgbClr val="5D6B79"/>
+                </a:solidFill>
+                <a:latin typeface="Microsoft JhengHei"/>
+              </a:rPr>
+              <a:t>圖稿原始碼：docs/images/D-39-admin-detailed-flow.mmd</a:t>
+            </a:r>
+          </a:p>
+        </p:txBody>
+      </p:sp>
+      <p:sp>
+        <p:nvSpPr>
+          <p:cNvPr id="8" name="TextBox 7"/>
+          <p:cNvSpPr txBox="1"/>
+          <p:nvPr/>
+        </p:nvSpPr>
+        <p:spPr>
+          <a:xfrm>
+            <a:off x="731520" y="2971800"/>
+            <a:ext cx="10698480" cy="411480"/>
+          </a:xfrm>
+          <a:prstGeom prst="rect">
+            <a:avLst/>
+          </a:prstGeom>
+          <a:noFill/>
+        </p:spPr>
+        <p:txBody>
+          <a:bodyPr wrap="square" lIns="54864" rIns="54864" tIns="27432" bIns="27432" anchor="t">
+            <a:spAutoFit/>
+          </a:bodyPr>
+          <a:lstStyle/>
+          <a:p>
+            <a:pPr algn="ctr"/>
+            <a:r>
+              <a:rPr sz="1700" b="0">
+                <a:solidFill>
+                  <a:srgbClr val="5D6B79"/>
+                </a:solidFill>
+                <a:latin typeface="Microsoft JhengHei"/>
+              </a:rPr>
+              <a:t>目前環境尚未輸出 PNG；可將對應圖檔貼到此頁後，再上傳雲端或 Canva。</a:t>
+            </a:r>
+          </a:p>
+        </p:txBody>
+      </p:sp>
+    </p:spTree>
+  </p:cSld>
+  <p:clrMapOvr>
+    <a:masterClrMapping/>
+  </p:clrMapOvr>
+</p:sld>
+</file>
+
 <file path=ppt/slides/slide4.xml><?xml version="1.0" encoding="utf-8"?>
 <p:sld xmlns:a="http://schemas.openxmlformats.org/drawingml/2006/main" xmlns:p="http://schemas.openxmlformats.org/presentationml/2006/main" xmlns:r="http://schemas.openxmlformats.org/officeDocument/2006/relationships">
   <p:cSld>
@@ -9151,6 +11676,1401 @@
                 <a:latin typeface="Microsoft JhengHei"/>
               </a:rPr>
               <a:t>原圖：docs/images/D-01-use-case-staff.png</a:t>
+            </a:r>
+          </a:p>
+        </p:txBody>
+      </p:sp>
+    </p:spTree>
+  </p:cSld>
+  <p:clrMapOvr>
+    <a:masterClrMapping/>
+  </p:clrMapOvr>
+</p:sld>
+</file>
+
+<file path=ppt/slides/slide40.xml><?xml version="1.0" encoding="utf-8"?>
+<p:sld xmlns:a="http://schemas.openxmlformats.org/drawingml/2006/main" xmlns:p="http://schemas.openxmlformats.org/presentationml/2006/main" xmlns:r="http://schemas.openxmlformats.org/officeDocument/2006/relationships">
+  <p:cSld>
+    <p:bg>
+      <p:bgPr>
+        <a:solidFill>
+          <a:srgbClr val="FFFFFF"/>
+        </a:solidFill>
+        <a:effectLst/>
+      </p:bgPr>
+    </p:bg>
+    <p:spTree>
+      <p:nvGrpSpPr>
+        <p:cNvPr id="1" name=""/>
+        <p:cNvGrpSpPr/>
+        <p:nvPr/>
+      </p:nvGrpSpPr>
+      <p:grpSpPr/>
+      <p:sp>
+        <p:nvSpPr>
+          <p:cNvPr id="2" name="Rectangle 1"/>
+          <p:cNvSpPr/>
+          <p:nvPr/>
+        </p:nvSpPr>
+        <p:spPr>
+          <a:xfrm>
+            <a:off x="0" y="0"/>
+            <a:ext cx="12191695" cy="164592"/>
+          </a:xfrm>
+          <a:prstGeom prst="rect">
+            <a:avLst/>
+          </a:prstGeom>
+          <a:solidFill>
+            <a:srgbClr val="208985"/>
+          </a:solidFill>
+          <a:ln>
+            <a:noFill/>
+          </a:ln>
+        </p:spPr>
+        <p:style>
+          <a:lnRef idx="1">
+            <a:schemeClr val="accent1"/>
+          </a:lnRef>
+          <a:fillRef idx="3">
+            <a:schemeClr val="accent1"/>
+          </a:fillRef>
+          <a:effectRef idx="2">
+            <a:schemeClr val="accent1"/>
+          </a:effectRef>
+          <a:fontRef idx="minor">
+            <a:schemeClr val="lt1"/>
+          </a:fontRef>
+        </p:style>
+        <p:txBody>
+          <a:bodyPr rtlCol="0" anchor="ctr"/>
+          <a:lstStyle/>
+          <a:p>
+            <a:pPr algn="ctr"/>
+          </a:p>
+        </p:txBody>
+      </p:sp>
+      <p:sp>
+        <p:nvSpPr>
+          <p:cNvPr id="3" name="TextBox 2"/>
+          <p:cNvSpPr txBox="1"/>
+          <p:nvPr/>
+        </p:nvSpPr>
+        <p:spPr>
+          <a:xfrm>
+            <a:off x="566928" y="438912"/>
+            <a:ext cx="10881360" cy="502920"/>
+          </a:xfrm>
+          <a:prstGeom prst="rect">
+            <a:avLst/>
+          </a:prstGeom>
+          <a:noFill/>
+        </p:spPr>
+        <p:txBody>
+          <a:bodyPr wrap="square" lIns="54864" rIns="54864" tIns="27432" bIns="27432" anchor="t">
+            <a:spAutoFit/>
+          </a:bodyPr>
+          <a:lstStyle/>
+          <a:p>
+            <a:pPr algn="l"/>
+            <a:r>
+              <a:rPr sz="2700" b="1">
+                <a:solidFill>
+                  <a:srgbClr val="142E4E"/>
+                </a:solidFill>
+                <a:latin typeface="Microsoft JhengHei"/>
+              </a:rPr>
+              <a:t>圖 37｜版本／歷史／下載流程圖</a:t>
+            </a:r>
+          </a:p>
+        </p:txBody>
+      </p:sp>
+      <p:sp>
+        <p:nvSpPr>
+          <p:cNvPr id="4" name="TextBox 3"/>
+          <p:cNvSpPr txBox="1"/>
+          <p:nvPr/>
+        </p:nvSpPr>
+        <p:spPr>
+          <a:xfrm>
+            <a:off x="10378440" y="512064"/>
+            <a:ext cx="1234440" cy="228600"/>
+          </a:xfrm>
+          <a:prstGeom prst="rect">
+            <a:avLst/>
+          </a:prstGeom>
+          <a:noFill/>
+        </p:spPr>
+        <p:txBody>
+          <a:bodyPr wrap="square" lIns="54864" rIns="54864" tIns="27432" bIns="27432" anchor="t">
+            <a:spAutoFit/>
+          </a:bodyPr>
+          <a:lstStyle/>
+          <a:p>
+            <a:pPr algn="r"/>
+            <a:r>
+              <a:rPr sz="900" b="1">
+                <a:solidFill>
+                  <a:srgbClr val="208985"/>
+                </a:solidFill>
+                <a:latin typeface="Microsoft JhengHei"/>
+              </a:rPr>
+              <a:t>流程圖附錄</a:t>
+            </a:r>
+          </a:p>
+        </p:txBody>
+      </p:sp>
+      <p:sp>
+        <p:nvSpPr>
+          <p:cNvPr id="5" name="TextBox 4"/>
+          <p:cNvSpPr txBox="1"/>
+          <p:nvPr/>
+        </p:nvSpPr>
+        <p:spPr>
+          <a:xfrm>
+            <a:off x="566928" y="6565392"/>
+            <a:ext cx="7772400" cy="182880"/>
+          </a:xfrm>
+          <a:prstGeom prst="rect">
+            <a:avLst/>
+          </a:prstGeom>
+          <a:noFill/>
+        </p:spPr>
+        <p:txBody>
+          <a:bodyPr wrap="square" lIns="54864" rIns="54864" tIns="27432" bIns="27432" anchor="t">
+            <a:spAutoFit/>
+          </a:bodyPr>
+          <a:lstStyle/>
+          <a:p>
+            <a:pPr algn="l"/>
+            <a:r>
+              <a:rPr sz="800" b="0">
+                <a:solidFill>
+                  <a:srgbClr val="5D6B79"/>
+                </a:solidFill>
+                <a:latin typeface="Microsoft JhengHei"/>
+              </a:rPr>
+              <a:t>資管科智慧學習歷程系統｜指導老師討論版</a:t>
+            </a:r>
+          </a:p>
+        </p:txBody>
+      </p:sp>
+      <p:sp>
+        <p:nvSpPr>
+          <p:cNvPr id="6" name="TextBox 5"/>
+          <p:cNvSpPr txBox="1"/>
+          <p:nvPr/>
+        </p:nvSpPr>
+        <p:spPr>
+          <a:xfrm>
+            <a:off x="731520" y="1554480"/>
+            <a:ext cx="10698480" cy="457200"/>
+          </a:xfrm>
+          <a:prstGeom prst="rect">
+            <a:avLst/>
+          </a:prstGeom>
+          <a:noFill/>
+        </p:spPr>
+        <p:txBody>
+          <a:bodyPr wrap="square" lIns="54864" rIns="54864" tIns="27432" bIns="27432" anchor="t">
+            <a:spAutoFit/>
+          </a:bodyPr>
+          <a:lstStyle/>
+          <a:p>
+            <a:pPr algn="ctr"/>
+            <a:r>
+              <a:rPr sz="2800" b="1">
+                <a:solidFill>
+                  <a:srgbClr val="142E4E"/>
+                </a:solidFill>
+                <a:latin typeface="Microsoft JhengHei"/>
+              </a:rPr>
+              <a:t>此頁保留圖名與貼圖位置</a:t>
+            </a:r>
+          </a:p>
+        </p:txBody>
+      </p:sp>
+      <p:sp>
+        <p:nvSpPr>
+          <p:cNvPr id="7" name="TextBox 6"/>
+          <p:cNvSpPr txBox="1"/>
+          <p:nvPr/>
+        </p:nvSpPr>
+        <p:spPr>
+          <a:xfrm>
+            <a:off x="731520" y="2331720"/>
+            <a:ext cx="10698480" cy="320040"/>
+          </a:xfrm>
+          <a:prstGeom prst="rect">
+            <a:avLst/>
+          </a:prstGeom>
+          <a:noFill/>
+        </p:spPr>
+        <p:txBody>
+          <a:bodyPr wrap="square" lIns="54864" rIns="54864" tIns="27432" bIns="27432" anchor="t">
+            <a:spAutoFit/>
+          </a:bodyPr>
+          <a:lstStyle/>
+          <a:p>
+            <a:pPr algn="ctr"/>
+            <a:r>
+              <a:rPr sz="1700" b="0">
+                <a:solidFill>
+                  <a:srgbClr val="5D6B79"/>
+                </a:solidFill>
+                <a:latin typeface="Microsoft JhengHei"/>
+              </a:rPr>
+              <a:t>圖稿原始碼：docs/images/D-40-version-history-download-flow.mmd</a:t>
+            </a:r>
+          </a:p>
+        </p:txBody>
+      </p:sp>
+      <p:sp>
+        <p:nvSpPr>
+          <p:cNvPr id="8" name="TextBox 7"/>
+          <p:cNvSpPr txBox="1"/>
+          <p:nvPr/>
+        </p:nvSpPr>
+        <p:spPr>
+          <a:xfrm>
+            <a:off x="731520" y="2971800"/>
+            <a:ext cx="10698480" cy="411480"/>
+          </a:xfrm>
+          <a:prstGeom prst="rect">
+            <a:avLst/>
+          </a:prstGeom>
+          <a:noFill/>
+        </p:spPr>
+        <p:txBody>
+          <a:bodyPr wrap="square" lIns="54864" rIns="54864" tIns="27432" bIns="27432" anchor="t">
+            <a:spAutoFit/>
+          </a:bodyPr>
+          <a:lstStyle/>
+          <a:p>
+            <a:pPr algn="ctr"/>
+            <a:r>
+              <a:rPr sz="1700" b="0">
+                <a:solidFill>
+                  <a:srgbClr val="5D6B79"/>
+                </a:solidFill>
+                <a:latin typeface="Microsoft JhengHei"/>
+              </a:rPr>
+              <a:t>目前環境尚未輸出 PNG；可將對應圖檔貼到此頁後，再上傳雲端或 Canva。</a:t>
+            </a:r>
+          </a:p>
+        </p:txBody>
+      </p:sp>
+    </p:spTree>
+  </p:cSld>
+  <p:clrMapOvr>
+    <a:masterClrMapping/>
+  </p:clrMapOvr>
+</p:sld>
+</file>
+
+<file path=ppt/slides/slide41.xml><?xml version="1.0" encoding="utf-8"?>
+<p:sld xmlns:a="http://schemas.openxmlformats.org/drawingml/2006/main" xmlns:p="http://schemas.openxmlformats.org/presentationml/2006/main" xmlns:r="http://schemas.openxmlformats.org/officeDocument/2006/relationships">
+  <p:cSld>
+    <p:bg>
+      <p:bgPr>
+        <a:solidFill>
+          <a:srgbClr val="FFFFFF"/>
+        </a:solidFill>
+        <a:effectLst/>
+      </p:bgPr>
+    </p:bg>
+    <p:spTree>
+      <p:nvGrpSpPr>
+        <p:cNvPr id="1" name=""/>
+        <p:cNvGrpSpPr/>
+        <p:nvPr/>
+      </p:nvGrpSpPr>
+      <p:grpSpPr/>
+      <p:sp>
+        <p:nvSpPr>
+          <p:cNvPr id="2" name="Rectangle 1"/>
+          <p:cNvSpPr/>
+          <p:nvPr/>
+        </p:nvSpPr>
+        <p:spPr>
+          <a:xfrm>
+            <a:off x="0" y="0"/>
+            <a:ext cx="12191695" cy="164592"/>
+          </a:xfrm>
+          <a:prstGeom prst="rect">
+            <a:avLst/>
+          </a:prstGeom>
+          <a:solidFill>
+            <a:srgbClr val="208985"/>
+          </a:solidFill>
+          <a:ln>
+            <a:noFill/>
+          </a:ln>
+        </p:spPr>
+        <p:style>
+          <a:lnRef idx="1">
+            <a:schemeClr val="accent1"/>
+          </a:lnRef>
+          <a:fillRef idx="3">
+            <a:schemeClr val="accent1"/>
+          </a:fillRef>
+          <a:effectRef idx="2">
+            <a:schemeClr val="accent1"/>
+          </a:effectRef>
+          <a:fontRef idx="minor">
+            <a:schemeClr val="lt1"/>
+          </a:fontRef>
+        </p:style>
+        <p:txBody>
+          <a:bodyPr rtlCol="0" anchor="ctr"/>
+          <a:lstStyle/>
+          <a:p>
+            <a:pPr algn="ctr"/>
+          </a:p>
+        </p:txBody>
+      </p:sp>
+      <p:sp>
+        <p:nvSpPr>
+          <p:cNvPr id="3" name="TextBox 2"/>
+          <p:cNvSpPr txBox="1"/>
+          <p:nvPr/>
+        </p:nvSpPr>
+        <p:spPr>
+          <a:xfrm>
+            <a:off x="566928" y="438912"/>
+            <a:ext cx="10881360" cy="502920"/>
+          </a:xfrm>
+          <a:prstGeom prst="rect">
+            <a:avLst/>
+          </a:prstGeom>
+          <a:noFill/>
+        </p:spPr>
+        <p:txBody>
+          <a:bodyPr wrap="square" lIns="54864" rIns="54864" tIns="27432" bIns="27432" anchor="t">
+            <a:spAutoFit/>
+          </a:bodyPr>
+          <a:lstStyle/>
+          <a:p>
+            <a:pPr algn="l"/>
+            <a:r>
+              <a:rPr sz="2700" b="1">
+                <a:solidFill>
+                  <a:srgbClr val="142E4E"/>
+                </a:solidFill>
+                <a:latin typeface="Microsoft JhengHei"/>
+              </a:rPr>
+              <a:t>圖 38｜學生主工作台展示架構</a:t>
+            </a:r>
+          </a:p>
+        </p:txBody>
+      </p:sp>
+      <p:sp>
+        <p:nvSpPr>
+          <p:cNvPr id="4" name="TextBox 3"/>
+          <p:cNvSpPr txBox="1"/>
+          <p:nvPr/>
+        </p:nvSpPr>
+        <p:spPr>
+          <a:xfrm>
+            <a:off x="10378440" y="512064"/>
+            <a:ext cx="1234440" cy="228600"/>
+          </a:xfrm>
+          <a:prstGeom prst="rect">
+            <a:avLst/>
+          </a:prstGeom>
+          <a:noFill/>
+        </p:spPr>
+        <p:txBody>
+          <a:bodyPr wrap="square" lIns="54864" rIns="54864" tIns="27432" bIns="27432" anchor="t">
+            <a:spAutoFit/>
+          </a:bodyPr>
+          <a:lstStyle/>
+          <a:p>
+            <a:pPr algn="r"/>
+            <a:r>
+              <a:rPr sz="900" b="1">
+                <a:solidFill>
+                  <a:srgbClr val="208985"/>
+                </a:solidFill>
+                <a:latin typeface="Microsoft JhengHei"/>
+              </a:rPr>
+              <a:t>流程圖附錄</a:t>
+            </a:r>
+          </a:p>
+        </p:txBody>
+      </p:sp>
+      <p:sp>
+        <p:nvSpPr>
+          <p:cNvPr id="5" name="TextBox 4"/>
+          <p:cNvSpPr txBox="1"/>
+          <p:nvPr/>
+        </p:nvSpPr>
+        <p:spPr>
+          <a:xfrm>
+            <a:off x="566928" y="6565392"/>
+            <a:ext cx="7772400" cy="182880"/>
+          </a:xfrm>
+          <a:prstGeom prst="rect">
+            <a:avLst/>
+          </a:prstGeom>
+          <a:noFill/>
+        </p:spPr>
+        <p:txBody>
+          <a:bodyPr wrap="square" lIns="54864" rIns="54864" tIns="27432" bIns="27432" anchor="t">
+            <a:spAutoFit/>
+          </a:bodyPr>
+          <a:lstStyle/>
+          <a:p>
+            <a:pPr algn="l"/>
+            <a:r>
+              <a:rPr sz="800" b="0">
+                <a:solidFill>
+                  <a:srgbClr val="5D6B79"/>
+                </a:solidFill>
+                <a:latin typeface="Microsoft JhengHei"/>
+              </a:rPr>
+              <a:t>資管科智慧學習歷程系統｜指導老師討論版</a:t>
+            </a:r>
+          </a:p>
+        </p:txBody>
+      </p:sp>
+      <p:sp>
+        <p:nvSpPr>
+          <p:cNvPr id="6" name="TextBox 5"/>
+          <p:cNvSpPr txBox="1"/>
+          <p:nvPr/>
+        </p:nvSpPr>
+        <p:spPr>
+          <a:xfrm>
+            <a:off x="731520" y="1554480"/>
+            <a:ext cx="10698480" cy="457200"/>
+          </a:xfrm>
+          <a:prstGeom prst="rect">
+            <a:avLst/>
+          </a:prstGeom>
+          <a:noFill/>
+        </p:spPr>
+        <p:txBody>
+          <a:bodyPr wrap="square" lIns="54864" rIns="54864" tIns="27432" bIns="27432" anchor="t">
+            <a:spAutoFit/>
+          </a:bodyPr>
+          <a:lstStyle/>
+          <a:p>
+            <a:pPr algn="ctr"/>
+            <a:r>
+              <a:rPr sz="2800" b="1">
+                <a:solidFill>
+                  <a:srgbClr val="142E4E"/>
+                </a:solidFill>
+                <a:latin typeface="Microsoft JhengHei"/>
+              </a:rPr>
+              <a:t>此頁保留圖名與貼圖位置</a:t>
+            </a:r>
+          </a:p>
+        </p:txBody>
+      </p:sp>
+      <p:sp>
+        <p:nvSpPr>
+          <p:cNvPr id="7" name="TextBox 6"/>
+          <p:cNvSpPr txBox="1"/>
+          <p:nvPr/>
+        </p:nvSpPr>
+        <p:spPr>
+          <a:xfrm>
+            <a:off x="731520" y="2331720"/>
+            <a:ext cx="10698480" cy="320040"/>
+          </a:xfrm>
+          <a:prstGeom prst="rect">
+            <a:avLst/>
+          </a:prstGeom>
+          <a:noFill/>
+        </p:spPr>
+        <p:txBody>
+          <a:bodyPr wrap="square" lIns="54864" rIns="54864" tIns="27432" bIns="27432" anchor="t">
+            <a:spAutoFit/>
+          </a:bodyPr>
+          <a:lstStyle/>
+          <a:p>
+            <a:pPr algn="ctr"/>
+            <a:r>
+              <a:rPr sz="1700" b="0">
+                <a:solidFill>
+                  <a:srgbClr val="5D6B79"/>
+                </a:solidFill>
+                <a:latin typeface="Microsoft JhengHei"/>
+              </a:rPr>
+              <a:t>圖稿原始碼：docs/images/D-41-student-dashboard-wireframe.mmd</a:t>
+            </a:r>
+          </a:p>
+        </p:txBody>
+      </p:sp>
+      <p:sp>
+        <p:nvSpPr>
+          <p:cNvPr id="8" name="TextBox 7"/>
+          <p:cNvSpPr txBox="1"/>
+          <p:nvPr/>
+        </p:nvSpPr>
+        <p:spPr>
+          <a:xfrm>
+            <a:off x="731520" y="2971800"/>
+            <a:ext cx="10698480" cy="411480"/>
+          </a:xfrm>
+          <a:prstGeom prst="rect">
+            <a:avLst/>
+          </a:prstGeom>
+          <a:noFill/>
+        </p:spPr>
+        <p:txBody>
+          <a:bodyPr wrap="square" lIns="54864" rIns="54864" tIns="27432" bIns="27432" anchor="t">
+            <a:spAutoFit/>
+          </a:bodyPr>
+          <a:lstStyle/>
+          <a:p>
+            <a:pPr algn="ctr"/>
+            <a:r>
+              <a:rPr sz="1700" b="0">
+                <a:solidFill>
+                  <a:srgbClr val="5D6B79"/>
+                </a:solidFill>
+                <a:latin typeface="Microsoft JhengHei"/>
+              </a:rPr>
+              <a:t>目前環境尚未輸出 PNG；可將對應圖檔貼到此頁後，再上傳雲端或 Canva。</a:t>
+            </a:r>
+          </a:p>
+        </p:txBody>
+      </p:sp>
+    </p:spTree>
+  </p:cSld>
+  <p:clrMapOvr>
+    <a:masterClrMapping/>
+  </p:clrMapOvr>
+</p:sld>
+</file>
+
+<file path=ppt/slides/slide42.xml><?xml version="1.0" encoding="utf-8"?>
+<p:sld xmlns:a="http://schemas.openxmlformats.org/drawingml/2006/main" xmlns:p="http://schemas.openxmlformats.org/presentationml/2006/main" xmlns:r="http://schemas.openxmlformats.org/officeDocument/2006/relationships">
+  <p:cSld>
+    <p:bg>
+      <p:bgPr>
+        <a:solidFill>
+          <a:srgbClr val="FFFFFF"/>
+        </a:solidFill>
+        <a:effectLst/>
+      </p:bgPr>
+    </p:bg>
+    <p:spTree>
+      <p:nvGrpSpPr>
+        <p:cNvPr id="1" name=""/>
+        <p:cNvGrpSpPr/>
+        <p:nvPr/>
+      </p:nvGrpSpPr>
+      <p:grpSpPr/>
+      <p:sp>
+        <p:nvSpPr>
+          <p:cNvPr id="2" name="Rectangle 1"/>
+          <p:cNvSpPr/>
+          <p:nvPr/>
+        </p:nvSpPr>
+        <p:spPr>
+          <a:xfrm>
+            <a:off x="0" y="0"/>
+            <a:ext cx="12191695" cy="164592"/>
+          </a:xfrm>
+          <a:prstGeom prst="rect">
+            <a:avLst/>
+          </a:prstGeom>
+          <a:solidFill>
+            <a:srgbClr val="208985"/>
+          </a:solidFill>
+          <a:ln>
+            <a:noFill/>
+          </a:ln>
+        </p:spPr>
+        <p:style>
+          <a:lnRef idx="1">
+            <a:schemeClr val="accent1"/>
+          </a:lnRef>
+          <a:fillRef idx="3">
+            <a:schemeClr val="accent1"/>
+          </a:fillRef>
+          <a:effectRef idx="2">
+            <a:schemeClr val="accent1"/>
+          </a:effectRef>
+          <a:fontRef idx="minor">
+            <a:schemeClr val="lt1"/>
+          </a:fontRef>
+        </p:style>
+        <p:txBody>
+          <a:bodyPr rtlCol="0" anchor="ctr"/>
+          <a:lstStyle/>
+          <a:p>
+            <a:pPr algn="ctr"/>
+          </a:p>
+        </p:txBody>
+      </p:sp>
+      <p:sp>
+        <p:nvSpPr>
+          <p:cNvPr id="3" name="TextBox 2"/>
+          <p:cNvSpPr txBox="1"/>
+          <p:nvPr/>
+        </p:nvSpPr>
+        <p:spPr>
+          <a:xfrm>
+            <a:off x="566928" y="438912"/>
+            <a:ext cx="10881360" cy="502920"/>
+          </a:xfrm>
+          <a:prstGeom prst="rect">
+            <a:avLst/>
+          </a:prstGeom>
+          <a:noFill/>
+        </p:spPr>
+        <p:txBody>
+          <a:bodyPr wrap="square" lIns="54864" rIns="54864" tIns="27432" bIns="27432" anchor="t">
+            <a:spAutoFit/>
+          </a:bodyPr>
+          <a:lstStyle/>
+          <a:p>
+            <a:pPr algn="l"/>
+            <a:r>
+              <a:rPr sz="2700" b="1">
+                <a:solidFill>
+                  <a:srgbClr val="142E4E"/>
+                </a:solidFill>
+                <a:latin typeface="Microsoft JhengHei"/>
+              </a:rPr>
+              <a:t>圖 39｜學生資料確認頁展示架構</a:t>
+            </a:r>
+          </a:p>
+        </p:txBody>
+      </p:sp>
+      <p:sp>
+        <p:nvSpPr>
+          <p:cNvPr id="4" name="TextBox 3"/>
+          <p:cNvSpPr txBox="1"/>
+          <p:nvPr/>
+        </p:nvSpPr>
+        <p:spPr>
+          <a:xfrm>
+            <a:off x="10378440" y="512064"/>
+            <a:ext cx="1234440" cy="228600"/>
+          </a:xfrm>
+          <a:prstGeom prst="rect">
+            <a:avLst/>
+          </a:prstGeom>
+          <a:noFill/>
+        </p:spPr>
+        <p:txBody>
+          <a:bodyPr wrap="square" lIns="54864" rIns="54864" tIns="27432" bIns="27432" anchor="t">
+            <a:spAutoFit/>
+          </a:bodyPr>
+          <a:lstStyle/>
+          <a:p>
+            <a:pPr algn="r"/>
+            <a:r>
+              <a:rPr sz="900" b="1">
+                <a:solidFill>
+                  <a:srgbClr val="208985"/>
+                </a:solidFill>
+                <a:latin typeface="Microsoft JhengHei"/>
+              </a:rPr>
+              <a:t>流程圖附錄</a:t>
+            </a:r>
+          </a:p>
+        </p:txBody>
+      </p:sp>
+      <p:sp>
+        <p:nvSpPr>
+          <p:cNvPr id="5" name="TextBox 4"/>
+          <p:cNvSpPr txBox="1"/>
+          <p:nvPr/>
+        </p:nvSpPr>
+        <p:spPr>
+          <a:xfrm>
+            <a:off x="566928" y="6565392"/>
+            <a:ext cx="7772400" cy="182880"/>
+          </a:xfrm>
+          <a:prstGeom prst="rect">
+            <a:avLst/>
+          </a:prstGeom>
+          <a:noFill/>
+        </p:spPr>
+        <p:txBody>
+          <a:bodyPr wrap="square" lIns="54864" rIns="54864" tIns="27432" bIns="27432" anchor="t">
+            <a:spAutoFit/>
+          </a:bodyPr>
+          <a:lstStyle/>
+          <a:p>
+            <a:pPr algn="l"/>
+            <a:r>
+              <a:rPr sz="800" b="0">
+                <a:solidFill>
+                  <a:srgbClr val="5D6B79"/>
+                </a:solidFill>
+                <a:latin typeface="Microsoft JhengHei"/>
+              </a:rPr>
+              <a:t>資管科智慧學習歷程系統｜指導老師討論版</a:t>
+            </a:r>
+          </a:p>
+        </p:txBody>
+      </p:sp>
+      <p:sp>
+        <p:nvSpPr>
+          <p:cNvPr id="6" name="TextBox 5"/>
+          <p:cNvSpPr txBox="1"/>
+          <p:nvPr/>
+        </p:nvSpPr>
+        <p:spPr>
+          <a:xfrm>
+            <a:off x="731520" y="1554480"/>
+            <a:ext cx="10698480" cy="457200"/>
+          </a:xfrm>
+          <a:prstGeom prst="rect">
+            <a:avLst/>
+          </a:prstGeom>
+          <a:noFill/>
+        </p:spPr>
+        <p:txBody>
+          <a:bodyPr wrap="square" lIns="54864" rIns="54864" tIns="27432" bIns="27432" anchor="t">
+            <a:spAutoFit/>
+          </a:bodyPr>
+          <a:lstStyle/>
+          <a:p>
+            <a:pPr algn="ctr"/>
+            <a:r>
+              <a:rPr sz="2800" b="1">
+                <a:solidFill>
+                  <a:srgbClr val="142E4E"/>
+                </a:solidFill>
+                <a:latin typeface="Microsoft JhengHei"/>
+              </a:rPr>
+              <a:t>此頁保留圖名與貼圖位置</a:t>
+            </a:r>
+          </a:p>
+        </p:txBody>
+      </p:sp>
+      <p:sp>
+        <p:nvSpPr>
+          <p:cNvPr id="7" name="TextBox 6"/>
+          <p:cNvSpPr txBox="1"/>
+          <p:nvPr/>
+        </p:nvSpPr>
+        <p:spPr>
+          <a:xfrm>
+            <a:off x="731520" y="2331720"/>
+            <a:ext cx="10698480" cy="320040"/>
+          </a:xfrm>
+          <a:prstGeom prst="rect">
+            <a:avLst/>
+          </a:prstGeom>
+          <a:noFill/>
+        </p:spPr>
+        <p:txBody>
+          <a:bodyPr wrap="square" lIns="54864" rIns="54864" tIns="27432" bIns="27432" anchor="t">
+            <a:spAutoFit/>
+          </a:bodyPr>
+          <a:lstStyle/>
+          <a:p>
+            <a:pPr algn="ctr"/>
+            <a:r>
+              <a:rPr sz="1700" b="0">
+                <a:solidFill>
+                  <a:srgbClr val="5D6B79"/>
+                </a:solidFill>
+                <a:latin typeface="Microsoft JhengHei"/>
+              </a:rPr>
+              <a:t>圖稿原始碼：docs/images/D-42-data-confirmation-wireframe.mmd</a:t>
+            </a:r>
+          </a:p>
+        </p:txBody>
+      </p:sp>
+      <p:sp>
+        <p:nvSpPr>
+          <p:cNvPr id="8" name="TextBox 7"/>
+          <p:cNvSpPr txBox="1"/>
+          <p:nvPr/>
+        </p:nvSpPr>
+        <p:spPr>
+          <a:xfrm>
+            <a:off x="731520" y="2971800"/>
+            <a:ext cx="10698480" cy="411480"/>
+          </a:xfrm>
+          <a:prstGeom prst="rect">
+            <a:avLst/>
+          </a:prstGeom>
+          <a:noFill/>
+        </p:spPr>
+        <p:txBody>
+          <a:bodyPr wrap="square" lIns="54864" rIns="54864" tIns="27432" bIns="27432" anchor="t">
+            <a:spAutoFit/>
+          </a:bodyPr>
+          <a:lstStyle/>
+          <a:p>
+            <a:pPr algn="ctr"/>
+            <a:r>
+              <a:rPr sz="1700" b="0">
+                <a:solidFill>
+                  <a:srgbClr val="5D6B79"/>
+                </a:solidFill>
+                <a:latin typeface="Microsoft JhengHei"/>
+              </a:rPr>
+              <a:t>目前環境尚未輸出 PNG；可將對應圖檔貼到此頁後，再上傳雲端或 Canva。</a:t>
+            </a:r>
+          </a:p>
+        </p:txBody>
+      </p:sp>
+    </p:spTree>
+  </p:cSld>
+  <p:clrMapOvr>
+    <a:masterClrMapping/>
+  </p:clrMapOvr>
+</p:sld>
+</file>
+
+<file path=ppt/slides/slide43.xml><?xml version="1.0" encoding="utf-8"?>
+<p:sld xmlns:a="http://schemas.openxmlformats.org/drawingml/2006/main" xmlns:p="http://schemas.openxmlformats.org/presentationml/2006/main" xmlns:r="http://schemas.openxmlformats.org/officeDocument/2006/relationships">
+  <p:cSld>
+    <p:bg>
+      <p:bgPr>
+        <a:solidFill>
+          <a:srgbClr val="FFFFFF"/>
+        </a:solidFill>
+        <a:effectLst/>
+      </p:bgPr>
+    </p:bg>
+    <p:spTree>
+      <p:nvGrpSpPr>
+        <p:cNvPr id="1" name=""/>
+        <p:cNvGrpSpPr/>
+        <p:nvPr/>
+      </p:nvGrpSpPr>
+      <p:grpSpPr/>
+      <p:sp>
+        <p:nvSpPr>
+          <p:cNvPr id="2" name="Rectangle 1"/>
+          <p:cNvSpPr/>
+          <p:nvPr/>
+        </p:nvSpPr>
+        <p:spPr>
+          <a:xfrm>
+            <a:off x="0" y="0"/>
+            <a:ext cx="12191695" cy="164592"/>
+          </a:xfrm>
+          <a:prstGeom prst="rect">
+            <a:avLst/>
+          </a:prstGeom>
+          <a:solidFill>
+            <a:srgbClr val="208985"/>
+          </a:solidFill>
+          <a:ln>
+            <a:noFill/>
+          </a:ln>
+        </p:spPr>
+        <p:style>
+          <a:lnRef idx="1">
+            <a:schemeClr val="accent1"/>
+          </a:lnRef>
+          <a:fillRef idx="3">
+            <a:schemeClr val="accent1"/>
+          </a:fillRef>
+          <a:effectRef idx="2">
+            <a:schemeClr val="accent1"/>
+          </a:effectRef>
+          <a:fontRef idx="minor">
+            <a:schemeClr val="lt1"/>
+          </a:fontRef>
+        </p:style>
+        <p:txBody>
+          <a:bodyPr rtlCol="0" anchor="ctr"/>
+          <a:lstStyle/>
+          <a:p>
+            <a:pPr algn="ctr"/>
+          </a:p>
+        </p:txBody>
+      </p:sp>
+      <p:sp>
+        <p:nvSpPr>
+          <p:cNvPr id="3" name="TextBox 2"/>
+          <p:cNvSpPr txBox="1"/>
+          <p:nvPr/>
+        </p:nvSpPr>
+        <p:spPr>
+          <a:xfrm>
+            <a:off x="566928" y="438912"/>
+            <a:ext cx="10881360" cy="502920"/>
+          </a:xfrm>
+          <a:prstGeom prst="rect">
+            <a:avLst/>
+          </a:prstGeom>
+          <a:noFill/>
+        </p:spPr>
+        <p:txBody>
+          <a:bodyPr wrap="square" lIns="54864" rIns="54864" tIns="27432" bIns="27432" anchor="t">
+            <a:spAutoFit/>
+          </a:bodyPr>
+          <a:lstStyle/>
+          <a:p>
+            <a:pPr algn="l"/>
+            <a:r>
+              <a:rPr sz="2700" b="1">
+                <a:solidFill>
+                  <a:srgbClr val="142E4E"/>
+                </a:solidFill>
+                <a:latin typeface="Microsoft JhengHei"/>
+              </a:rPr>
+              <a:t>圖 40｜導師審查頁展示架構</a:t>
+            </a:r>
+          </a:p>
+        </p:txBody>
+      </p:sp>
+      <p:sp>
+        <p:nvSpPr>
+          <p:cNvPr id="4" name="TextBox 3"/>
+          <p:cNvSpPr txBox="1"/>
+          <p:nvPr/>
+        </p:nvSpPr>
+        <p:spPr>
+          <a:xfrm>
+            <a:off x="10378440" y="512064"/>
+            <a:ext cx="1234440" cy="228600"/>
+          </a:xfrm>
+          <a:prstGeom prst="rect">
+            <a:avLst/>
+          </a:prstGeom>
+          <a:noFill/>
+        </p:spPr>
+        <p:txBody>
+          <a:bodyPr wrap="square" lIns="54864" rIns="54864" tIns="27432" bIns="27432" anchor="t">
+            <a:spAutoFit/>
+          </a:bodyPr>
+          <a:lstStyle/>
+          <a:p>
+            <a:pPr algn="r"/>
+            <a:r>
+              <a:rPr sz="900" b="1">
+                <a:solidFill>
+                  <a:srgbClr val="208985"/>
+                </a:solidFill>
+                <a:latin typeface="Microsoft JhengHei"/>
+              </a:rPr>
+              <a:t>流程圖附錄</a:t>
+            </a:r>
+          </a:p>
+        </p:txBody>
+      </p:sp>
+      <p:sp>
+        <p:nvSpPr>
+          <p:cNvPr id="5" name="TextBox 4"/>
+          <p:cNvSpPr txBox="1"/>
+          <p:nvPr/>
+        </p:nvSpPr>
+        <p:spPr>
+          <a:xfrm>
+            <a:off x="566928" y="6565392"/>
+            <a:ext cx="7772400" cy="182880"/>
+          </a:xfrm>
+          <a:prstGeom prst="rect">
+            <a:avLst/>
+          </a:prstGeom>
+          <a:noFill/>
+        </p:spPr>
+        <p:txBody>
+          <a:bodyPr wrap="square" lIns="54864" rIns="54864" tIns="27432" bIns="27432" anchor="t">
+            <a:spAutoFit/>
+          </a:bodyPr>
+          <a:lstStyle/>
+          <a:p>
+            <a:pPr algn="l"/>
+            <a:r>
+              <a:rPr sz="800" b="0">
+                <a:solidFill>
+                  <a:srgbClr val="5D6B79"/>
+                </a:solidFill>
+                <a:latin typeface="Microsoft JhengHei"/>
+              </a:rPr>
+              <a:t>資管科智慧學習歷程系統｜指導老師討論版</a:t>
+            </a:r>
+          </a:p>
+        </p:txBody>
+      </p:sp>
+      <p:sp>
+        <p:nvSpPr>
+          <p:cNvPr id="6" name="TextBox 5"/>
+          <p:cNvSpPr txBox="1"/>
+          <p:nvPr/>
+        </p:nvSpPr>
+        <p:spPr>
+          <a:xfrm>
+            <a:off x="731520" y="1554480"/>
+            <a:ext cx="10698480" cy="457200"/>
+          </a:xfrm>
+          <a:prstGeom prst="rect">
+            <a:avLst/>
+          </a:prstGeom>
+          <a:noFill/>
+        </p:spPr>
+        <p:txBody>
+          <a:bodyPr wrap="square" lIns="54864" rIns="54864" tIns="27432" bIns="27432" anchor="t">
+            <a:spAutoFit/>
+          </a:bodyPr>
+          <a:lstStyle/>
+          <a:p>
+            <a:pPr algn="ctr"/>
+            <a:r>
+              <a:rPr sz="2800" b="1">
+                <a:solidFill>
+                  <a:srgbClr val="142E4E"/>
+                </a:solidFill>
+                <a:latin typeface="Microsoft JhengHei"/>
+              </a:rPr>
+              <a:t>此頁保留圖名與貼圖位置</a:t>
+            </a:r>
+          </a:p>
+        </p:txBody>
+      </p:sp>
+      <p:sp>
+        <p:nvSpPr>
+          <p:cNvPr id="7" name="TextBox 6"/>
+          <p:cNvSpPr txBox="1"/>
+          <p:nvPr/>
+        </p:nvSpPr>
+        <p:spPr>
+          <a:xfrm>
+            <a:off x="731520" y="2331720"/>
+            <a:ext cx="10698480" cy="320040"/>
+          </a:xfrm>
+          <a:prstGeom prst="rect">
+            <a:avLst/>
+          </a:prstGeom>
+          <a:noFill/>
+        </p:spPr>
+        <p:txBody>
+          <a:bodyPr wrap="square" lIns="54864" rIns="54864" tIns="27432" bIns="27432" anchor="t">
+            <a:spAutoFit/>
+          </a:bodyPr>
+          <a:lstStyle/>
+          <a:p>
+            <a:pPr algn="ctr"/>
+            <a:r>
+              <a:rPr sz="1700" b="0">
+                <a:solidFill>
+                  <a:srgbClr val="5D6B79"/>
+                </a:solidFill>
+                <a:latin typeface="Microsoft JhengHei"/>
+              </a:rPr>
+              <a:t>圖稿原始碼：docs/images/D-43-teacher-review-wireframe.mmd</a:t>
+            </a:r>
+          </a:p>
+        </p:txBody>
+      </p:sp>
+      <p:sp>
+        <p:nvSpPr>
+          <p:cNvPr id="8" name="TextBox 7"/>
+          <p:cNvSpPr txBox="1"/>
+          <p:nvPr/>
+        </p:nvSpPr>
+        <p:spPr>
+          <a:xfrm>
+            <a:off x="731520" y="2971800"/>
+            <a:ext cx="10698480" cy="411480"/>
+          </a:xfrm>
+          <a:prstGeom prst="rect">
+            <a:avLst/>
+          </a:prstGeom>
+          <a:noFill/>
+        </p:spPr>
+        <p:txBody>
+          <a:bodyPr wrap="square" lIns="54864" rIns="54864" tIns="27432" bIns="27432" anchor="t">
+            <a:spAutoFit/>
+          </a:bodyPr>
+          <a:lstStyle/>
+          <a:p>
+            <a:pPr algn="ctr"/>
+            <a:r>
+              <a:rPr sz="1700" b="0">
+                <a:solidFill>
+                  <a:srgbClr val="5D6B79"/>
+                </a:solidFill>
+                <a:latin typeface="Microsoft JhengHei"/>
+              </a:rPr>
+              <a:t>目前環境尚未輸出 PNG；可將對應圖檔貼到此頁後，再上傳雲端或 Canva。</a:t>
+            </a:r>
+          </a:p>
+        </p:txBody>
+      </p:sp>
+    </p:spTree>
+  </p:cSld>
+  <p:clrMapOvr>
+    <a:masterClrMapping/>
+  </p:clrMapOvr>
+</p:sld>
+</file>
+
+<file path=ppt/slides/slide44.xml><?xml version="1.0" encoding="utf-8"?>
+<p:sld xmlns:a="http://schemas.openxmlformats.org/drawingml/2006/main" xmlns:p="http://schemas.openxmlformats.org/presentationml/2006/main" xmlns:r="http://schemas.openxmlformats.org/officeDocument/2006/relationships">
+  <p:cSld>
+    <p:bg>
+      <p:bgPr>
+        <a:solidFill>
+          <a:srgbClr val="FFFFFF"/>
+        </a:solidFill>
+        <a:effectLst/>
+      </p:bgPr>
+    </p:bg>
+    <p:spTree>
+      <p:nvGrpSpPr>
+        <p:cNvPr id="1" name=""/>
+        <p:cNvGrpSpPr/>
+        <p:nvPr/>
+      </p:nvGrpSpPr>
+      <p:grpSpPr/>
+      <p:sp>
+        <p:nvSpPr>
+          <p:cNvPr id="2" name="Rectangle 1"/>
+          <p:cNvSpPr/>
+          <p:nvPr/>
+        </p:nvSpPr>
+        <p:spPr>
+          <a:xfrm>
+            <a:off x="0" y="0"/>
+            <a:ext cx="12191695" cy="164592"/>
+          </a:xfrm>
+          <a:prstGeom prst="rect">
+            <a:avLst/>
+          </a:prstGeom>
+          <a:solidFill>
+            <a:srgbClr val="208985"/>
+          </a:solidFill>
+          <a:ln>
+            <a:noFill/>
+          </a:ln>
+        </p:spPr>
+        <p:style>
+          <a:lnRef idx="1">
+            <a:schemeClr val="accent1"/>
+          </a:lnRef>
+          <a:fillRef idx="3">
+            <a:schemeClr val="accent1"/>
+          </a:fillRef>
+          <a:effectRef idx="2">
+            <a:schemeClr val="accent1"/>
+          </a:effectRef>
+          <a:fontRef idx="minor">
+            <a:schemeClr val="lt1"/>
+          </a:fontRef>
+        </p:style>
+        <p:txBody>
+          <a:bodyPr rtlCol="0" anchor="ctr"/>
+          <a:lstStyle/>
+          <a:p>
+            <a:pPr algn="ctr"/>
+          </a:p>
+        </p:txBody>
+      </p:sp>
+      <p:sp>
+        <p:nvSpPr>
+          <p:cNvPr id="3" name="TextBox 2"/>
+          <p:cNvSpPr txBox="1"/>
+          <p:nvPr/>
+        </p:nvSpPr>
+        <p:spPr>
+          <a:xfrm>
+            <a:off x="566928" y="438912"/>
+            <a:ext cx="10881360" cy="502920"/>
+          </a:xfrm>
+          <a:prstGeom prst="rect">
+            <a:avLst/>
+          </a:prstGeom>
+          <a:noFill/>
+        </p:spPr>
+        <p:txBody>
+          <a:bodyPr wrap="square" lIns="54864" rIns="54864" tIns="27432" bIns="27432" anchor="t">
+            <a:spAutoFit/>
+          </a:bodyPr>
+          <a:lstStyle/>
+          <a:p>
+            <a:pPr algn="l"/>
+            <a:r>
+              <a:rPr sz="2700" b="1">
+                <a:solidFill>
+                  <a:srgbClr val="142E4E"/>
+                </a:solidFill>
+                <a:latin typeface="Microsoft JhengHei"/>
+              </a:rPr>
+              <a:t>圖 41｜管理員維護頁展示架構</a:t>
+            </a:r>
+          </a:p>
+        </p:txBody>
+      </p:sp>
+      <p:sp>
+        <p:nvSpPr>
+          <p:cNvPr id="4" name="TextBox 3"/>
+          <p:cNvSpPr txBox="1"/>
+          <p:nvPr/>
+        </p:nvSpPr>
+        <p:spPr>
+          <a:xfrm>
+            <a:off x="10378440" y="512064"/>
+            <a:ext cx="1234440" cy="228600"/>
+          </a:xfrm>
+          <a:prstGeom prst="rect">
+            <a:avLst/>
+          </a:prstGeom>
+          <a:noFill/>
+        </p:spPr>
+        <p:txBody>
+          <a:bodyPr wrap="square" lIns="54864" rIns="54864" tIns="27432" bIns="27432" anchor="t">
+            <a:spAutoFit/>
+          </a:bodyPr>
+          <a:lstStyle/>
+          <a:p>
+            <a:pPr algn="r"/>
+            <a:r>
+              <a:rPr sz="900" b="1">
+                <a:solidFill>
+                  <a:srgbClr val="208985"/>
+                </a:solidFill>
+                <a:latin typeface="Microsoft JhengHei"/>
+              </a:rPr>
+              <a:t>流程圖附錄</a:t>
+            </a:r>
+          </a:p>
+        </p:txBody>
+      </p:sp>
+      <p:sp>
+        <p:nvSpPr>
+          <p:cNvPr id="5" name="TextBox 4"/>
+          <p:cNvSpPr txBox="1"/>
+          <p:nvPr/>
+        </p:nvSpPr>
+        <p:spPr>
+          <a:xfrm>
+            <a:off x="566928" y="6565392"/>
+            <a:ext cx="7772400" cy="182880"/>
+          </a:xfrm>
+          <a:prstGeom prst="rect">
+            <a:avLst/>
+          </a:prstGeom>
+          <a:noFill/>
+        </p:spPr>
+        <p:txBody>
+          <a:bodyPr wrap="square" lIns="54864" rIns="54864" tIns="27432" bIns="27432" anchor="t">
+            <a:spAutoFit/>
+          </a:bodyPr>
+          <a:lstStyle/>
+          <a:p>
+            <a:pPr algn="l"/>
+            <a:r>
+              <a:rPr sz="800" b="0">
+                <a:solidFill>
+                  <a:srgbClr val="5D6B79"/>
+                </a:solidFill>
+                <a:latin typeface="Microsoft JhengHei"/>
+              </a:rPr>
+              <a:t>資管科智慧學習歷程系統｜指導老師討論版</a:t>
+            </a:r>
+          </a:p>
+        </p:txBody>
+      </p:sp>
+      <p:sp>
+        <p:nvSpPr>
+          <p:cNvPr id="6" name="TextBox 5"/>
+          <p:cNvSpPr txBox="1"/>
+          <p:nvPr/>
+        </p:nvSpPr>
+        <p:spPr>
+          <a:xfrm>
+            <a:off x="731520" y="1554480"/>
+            <a:ext cx="10698480" cy="457200"/>
+          </a:xfrm>
+          <a:prstGeom prst="rect">
+            <a:avLst/>
+          </a:prstGeom>
+          <a:noFill/>
+        </p:spPr>
+        <p:txBody>
+          <a:bodyPr wrap="square" lIns="54864" rIns="54864" tIns="27432" bIns="27432" anchor="t">
+            <a:spAutoFit/>
+          </a:bodyPr>
+          <a:lstStyle/>
+          <a:p>
+            <a:pPr algn="ctr"/>
+            <a:r>
+              <a:rPr sz="2800" b="1">
+                <a:solidFill>
+                  <a:srgbClr val="142E4E"/>
+                </a:solidFill>
+                <a:latin typeface="Microsoft JhengHei"/>
+              </a:rPr>
+              <a:t>此頁保留圖名與貼圖位置</a:t>
+            </a:r>
+          </a:p>
+        </p:txBody>
+      </p:sp>
+      <p:sp>
+        <p:nvSpPr>
+          <p:cNvPr id="7" name="TextBox 6"/>
+          <p:cNvSpPr txBox="1"/>
+          <p:nvPr/>
+        </p:nvSpPr>
+        <p:spPr>
+          <a:xfrm>
+            <a:off x="731520" y="2331720"/>
+            <a:ext cx="10698480" cy="320040"/>
+          </a:xfrm>
+          <a:prstGeom prst="rect">
+            <a:avLst/>
+          </a:prstGeom>
+          <a:noFill/>
+        </p:spPr>
+        <p:txBody>
+          <a:bodyPr wrap="square" lIns="54864" rIns="54864" tIns="27432" bIns="27432" anchor="t">
+            <a:spAutoFit/>
+          </a:bodyPr>
+          <a:lstStyle/>
+          <a:p>
+            <a:pPr algn="ctr"/>
+            <a:r>
+              <a:rPr sz="1700" b="0">
+                <a:solidFill>
+                  <a:srgbClr val="5D6B79"/>
+                </a:solidFill>
+                <a:latin typeface="Microsoft JhengHei"/>
+              </a:rPr>
+              <a:t>圖稿原始碼：docs/images/D-44-admin-maintenance-wireframe.mmd</a:t>
+            </a:r>
+          </a:p>
+        </p:txBody>
+      </p:sp>
+      <p:sp>
+        <p:nvSpPr>
+          <p:cNvPr id="8" name="TextBox 7"/>
+          <p:cNvSpPr txBox="1"/>
+          <p:nvPr/>
+        </p:nvSpPr>
+        <p:spPr>
+          <a:xfrm>
+            <a:off x="731520" y="2971800"/>
+            <a:ext cx="10698480" cy="411480"/>
+          </a:xfrm>
+          <a:prstGeom prst="rect">
+            <a:avLst/>
+          </a:prstGeom>
+          <a:noFill/>
+        </p:spPr>
+        <p:txBody>
+          <a:bodyPr wrap="square" lIns="54864" rIns="54864" tIns="27432" bIns="27432" anchor="t">
+            <a:spAutoFit/>
+          </a:bodyPr>
+          <a:lstStyle/>
+          <a:p>
+            <a:pPr algn="ctr"/>
+            <a:r>
+              <a:rPr sz="1700" b="0">
+                <a:solidFill>
+                  <a:srgbClr val="5D6B79"/>
+                </a:solidFill>
+                <a:latin typeface="Microsoft JhengHei"/>
+              </a:rPr>
+              <a:t>目前環境尚未輸出 PNG；可將對應圖檔貼到此頁後，再上傳雲端或 Canva。</a:t>
             </a:r>
           </a:p>
         </p:txBody>
